--- a/figs/slip_length_summary/output/fig.pptx
+++ b/figs/slip_length_summary/output/fig.pptx
@@ -968,10 +968,10 @@
       </p:grpSpPr>
       <p:grpSp>
         <p:nvGrpSpPr>
-          <p:cNvPr id="7" name="グループ化 6">
+          <p:cNvPr id="8" name="グループ化 7">
             <a:extLst>
               <a:ext uri="{FF2B5EF4-FFF2-40B4-BE49-F238E27FC236}">
-                <a16:creationId xmlns:a16="http://schemas.microsoft.com/office/drawing/2014/main" id="{392F6F2A-8466-3962-BD8C-D0A4486D05CE}"/>
+                <a16:creationId xmlns:a16="http://schemas.microsoft.com/office/drawing/2014/main" id="{A4BF446A-84DF-E6B3-3A48-AAF1F44E4BC1}"/>
               </a:ext>
             </a:extLst>
           </p:cNvPr>
@@ -980,18 +980,18 @@
         </p:nvGrpSpPr>
         <p:grpSpPr>
           <a:xfrm>
-            <a:off x="3505200" y="1476374"/>
-            <a:ext cx="5181600" cy="3905251"/>
-            <a:chOff x="3505200" y="1476374"/>
-            <a:chExt cx="5181600" cy="3905251"/>
+            <a:off x="3505200" y="1476375"/>
+            <a:ext cx="5181600" cy="3905250"/>
+            <a:chOff x="3505200" y="1476375"/>
+            <a:chExt cx="5181600" cy="3905250"/>
           </a:xfrm>
         </p:grpSpPr>
         <p:pic>
           <p:nvPicPr>
-            <p:cNvPr id="3" name="グラフィックス 2">
+            <p:cNvPr id="5" name="グラフィックス 4">
               <a:extLst>
                 <a:ext uri="{FF2B5EF4-FFF2-40B4-BE49-F238E27FC236}">
-                  <a16:creationId xmlns:a16="http://schemas.microsoft.com/office/drawing/2014/main" id="{A4EAAC42-818B-0090-CC74-82C42C665389}"/>
+                  <a16:creationId xmlns:a16="http://schemas.microsoft.com/office/drawing/2014/main" id="{BD21589F-C510-3D82-6F1C-C70A77459BD0}"/>
                 </a:ext>
               </a:extLst>
             </p:cNvPr>
@@ -1008,15 +1008,14 @@
                 </a:ext>
               </a:extLst>
             </a:blip>
-            <a:srcRect t="11695"/>
             <a:stretch>
               <a:fillRect/>
             </a:stretch>
           </p:blipFill>
           <p:spPr>
             <a:xfrm>
-              <a:off x="4160980" y="1476374"/>
-              <a:ext cx="1685637" cy="3175481"/>
+              <a:off x="3505200" y="1476375"/>
+              <a:ext cx="5181600" cy="3905250"/>
             </a:xfrm>
             <a:prstGeom prst="rect">
               <a:avLst/>
@@ -1025,10 +1024,10 @@
         </p:pic>
         <p:pic>
           <p:nvPicPr>
-            <p:cNvPr id="5" name="グラフィックス 4">
+            <p:cNvPr id="6" name="グラフィックス 5">
               <a:extLst>
                 <a:ext uri="{FF2B5EF4-FFF2-40B4-BE49-F238E27FC236}">
-                  <a16:creationId xmlns:a16="http://schemas.microsoft.com/office/drawing/2014/main" id="{BD21589F-C510-3D82-6F1C-C70A77459BD0}"/>
+                  <a16:creationId xmlns:a16="http://schemas.microsoft.com/office/drawing/2014/main" id="{ADCCE5B4-BEF2-B358-533E-7E69EB7F81BC}"/>
                 </a:ext>
               </a:extLst>
             </p:cNvPr>
@@ -1045,14 +1044,15 @@
                 </a:ext>
               </a:extLst>
             </a:blip>
+            <a:srcRect t="12074"/>
             <a:stretch>
               <a:fillRect/>
             </a:stretch>
           </p:blipFill>
           <p:spPr>
             <a:xfrm>
-              <a:off x="3505200" y="1476375"/>
-              <a:ext cx="5181600" cy="3905250"/>
+              <a:off x="4095231" y="1476375"/>
+              <a:ext cx="2092803" cy="3197226"/>
             </a:xfrm>
             <a:prstGeom prst="rect">
               <a:avLst/>
@@ -1704,6 +1704,23 @@
 </file>
 
 <file path=customXml/item1.xml><?xml version="1.0" encoding="utf-8"?>
+<p:properties xmlns:p="http://schemas.microsoft.com/office/2006/metadata/properties" xmlns:xsi="http://www.w3.org/2001/XMLSchema-instance" xmlns:pc="http://schemas.microsoft.com/office/infopath/2007/PartnerControls">
+  <documentManagement>
+    <_activity xmlns="a4af94e1-c1fc-4949-80ee-6d0f2b25a4fd" xsi:nil="true"/>
+  </documentManagement>
+</p:properties>
+</file>
+
+<file path=customXml/item2.xml><?xml version="1.0" encoding="utf-8"?>
+<?mso-contentType ?>
+<FormTemplates xmlns="http://schemas.microsoft.com/sharepoint/v3/contenttype/forms">
+  <Display>DocumentLibraryForm</Display>
+  <Edit>DocumentLibraryForm</Edit>
+  <New>DocumentLibraryForm</New>
+</FormTemplates>
+</file>
+
+<file path=customXml/item3.xml><?xml version="1.0" encoding="utf-8"?>
 <ct:contentTypeSchema xmlns:ct="http://schemas.microsoft.com/office/2006/metadata/contentType" xmlns:ma="http://schemas.microsoft.com/office/2006/metadata/properties/metaAttributes" ct:_="" ma:_="" ma:contentTypeName="ドキュメント" ma:contentTypeID="0x01010001977AFA83253148B9A11DE7E57585DA" ma:contentTypeVersion="18" ma:contentTypeDescription="新しいドキュメントを作成します。" ma:contentTypeScope="" ma:versionID="c33b06d1a59709aebae5ef90ac421293">
   <xsd:schema xmlns:xsd="http://www.w3.org/2001/XMLSchema" xmlns:xs="http://www.w3.org/2001/XMLSchema" xmlns:p="http://schemas.microsoft.com/office/2006/metadata/properties" xmlns:ns3="a4af94e1-c1fc-4949-80ee-6d0f2b25a4fd" xmlns:ns4="6e67e666-c3e9-4393-909a-82e166baf630" targetNamespace="http://schemas.microsoft.com/office/2006/metadata/properties" ma:root="true" ma:fieldsID="5929bf68818a63ba6b6aa8003b159019" ns3:_="" ns4:_="">
     <xsd:import namespace="a4af94e1-c1fc-4949-80ee-6d0f2b25a4fd"/>
@@ -1956,24 +1973,32 @@
 </ct:contentTypeSchema>
 </file>
 
-<file path=customXml/item2.xml><?xml version="1.0" encoding="utf-8"?>
-<?mso-contentType ?>
-<FormTemplates xmlns="http://schemas.microsoft.com/sharepoint/v3/contenttype/forms">
-  <Display>DocumentLibraryForm</Display>
-  <Edit>DocumentLibraryForm</Edit>
-  <New>DocumentLibraryForm</New>
-</FormTemplates>
+<file path=customXml/itemProps1.xml><?xml version="1.0" encoding="utf-8"?>
+<ds:datastoreItem xmlns:ds="http://schemas.openxmlformats.org/officeDocument/2006/customXml" ds:itemID="{B536A920-CFA6-45F7-AAF4-D5E5B2A432A5}">
+  <ds:schemaRefs>
+    <ds:schemaRef ds:uri="http://schemas.microsoft.com/office/infopath/2007/PartnerControls"/>
+    <ds:schemaRef ds:uri="http://schemas.microsoft.com/office/2006/metadata/properties"/>
+    <ds:schemaRef ds:uri="http://schemas.microsoft.com/office/2006/documentManagement/types"/>
+    <ds:schemaRef ds:uri="http://purl.org/dc/elements/1.1/"/>
+    <ds:schemaRef ds:uri="http://purl.org/dc/dcmitype/"/>
+    <ds:schemaRef ds:uri="http://www.w3.org/XML/1998/namespace"/>
+    <ds:schemaRef ds:uri="a4af94e1-c1fc-4949-80ee-6d0f2b25a4fd"/>
+    <ds:schemaRef ds:uri="http://schemas.openxmlformats.org/package/2006/metadata/core-properties"/>
+    <ds:schemaRef ds:uri="6e67e666-c3e9-4393-909a-82e166baf630"/>
+    <ds:schemaRef ds:uri="http://purl.org/dc/terms/"/>
+  </ds:schemaRefs>
+</ds:datastoreItem>
 </file>
 
-<file path=customXml/item3.xml><?xml version="1.0" encoding="utf-8"?>
-<p:properties xmlns:p="http://schemas.microsoft.com/office/2006/metadata/properties" xmlns:xsi="http://www.w3.org/2001/XMLSchema-instance" xmlns:pc="http://schemas.microsoft.com/office/infopath/2007/PartnerControls">
-  <documentManagement>
-    <_activity xmlns="a4af94e1-c1fc-4949-80ee-6d0f2b25a4fd" xsi:nil="true"/>
-  </documentManagement>
-</p:properties>
+<file path=customXml/itemProps2.xml><?xml version="1.0" encoding="utf-8"?>
+<ds:datastoreItem xmlns:ds="http://schemas.openxmlformats.org/officeDocument/2006/customXml" ds:itemID="{A32B4A66-F859-40E3-BB80-2813DE49481C}">
+  <ds:schemaRefs>
+    <ds:schemaRef ds:uri="http://schemas.microsoft.com/sharepoint/v3/contenttype/forms"/>
+  </ds:schemaRefs>
+</ds:datastoreItem>
 </file>
 
-<file path=customXml/itemProps1.xml><?xml version="1.0" encoding="utf-8"?>
+<file path=customXml/itemProps3.xml><?xml version="1.0" encoding="utf-8"?>
 <ds:datastoreItem xmlns:ds="http://schemas.openxmlformats.org/officeDocument/2006/customXml" ds:itemID="{4CF7E964-C6F6-44DA-86BC-C4F5D23786D9}">
   <ds:schemaRefs>
     <ds:schemaRef ds:uri="http://schemas.microsoft.com/office/2006/metadata/contentType"/>
@@ -1990,29 +2015,4 @@
     <ds:schemaRef ds:uri="http://schemas.microsoft.com/internal/obd"/>
   </ds:schemaRefs>
 </ds:datastoreItem>
-</file>
-
-<file path=customXml/itemProps2.xml><?xml version="1.0" encoding="utf-8"?>
-<ds:datastoreItem xmlns:ds="http://schemas.openxmlformats.org/officeDocument/2006/customXml" ds:itemID="{A32B4A66-F859-40E3-BB80-2813DE49481C}">
-  <ds:schemaRefs>
-    <ds:schemaRef ds:uri="http://schemas.microsoft.com/sharepoint/v3/contenttype/forms"/>
-  </ds:schemaRefs>
-</ds:datastoreItem>
-</file>
-
-<file path=customXml/itemProps3.xml><?xml version="1.0" encoding="utf-8"?>
-<ds:datastoreItem xmlns:ds="http://schemas.openxmlformats.org/officeDocument/2006/customXml" ds:itemID="{B536A920-CFA6-45F7-AAF4-D5E5B2A432A5}">
-  <ds:schemaRefs>
-    <ds:schemaRef ds:uri="http://schemas.microsoft.com/office/infopath/2007/PartnerControls"/>
-    <ds:schemaRef ds:uri="http://schemas.microsoft.com/office/2006/metadata/properties"/>
-    <ds:schemaRef ds:uri="http://schemas.microsoft.com/office/2006/documentManagement/types"/>
-    <ds:schemaRef ds:uri="http://purl.org/dc/elements/1.1/"/>
-    <ds:schemaRef ds:uri="http://purl.org/dc/dcmitype/"/>
-    <ds:schemaRef ds:uri="http://www.w3.org/XML/1998/namespace"/>
-    <ds:schemaRef ds:uri="a4af94e1-c1fc-4949-80ee-6d0f2b25a4fd"/>
-    <ds:schemaRef ds:uri="http://schemas.openxmlformats.org/package/2006/metadata/core-properties"/>
-    <ds:schemaRef ds:uri="6e67e666-c3e9-4393-909a-82e166baf630"/>
-    <ds:schemaRef ds:uri="http://purl.org/dc/terms/"/>
-  </ds:schemaRefs>
-</ds:datastoreItem>
 </file>
--- a/figs/slip_length_summary/output/fig.pptx
+++ b/figs/slip_length_summary/output/fig.pptx
@@ -5,11 +5,13 @@
     <p:sldMasterId id="2147483648" r:id="rId4"/>
   </p:sldMasterIdLst>
   <p:notesMasterIdLst>
-    <p:notesMasterId r:id="rId7"/>
+    <p:notesMasterId r:id="rId9"/>
   </p:notesMasterIdLst>
   <p:sldIdLst>
     <p:sldId id="257" r:id="rId5"/>
     <p:sldId id="258" r:id="rId6"/>
+    <p:sldId id="259" r:id="rId7"/>
+    <p:sldId id="260" r:id="rId8"/>
   </p:sldIdLst>
   <p:sldSz cx="12192000" cy="6858000"/>
   <p:notesSz cx="6858000" cy="9144000"/>
@@ -1073,6 +1075,254 @@
 </p:sld>
 </file>
 
+<file path=ppt/slides/slide3.xml><?xml version="1.0" encoding="utf-8"?>
+<p:sld xmlns:a="http://schemas.openxmlformats.org/drawingml/2006/main" xmlns:r="http://schemas.openxmlformats.org/officeDocument/2006/relationships" xmlns:p="http://schemas.openxmlformats.org/presentationml/2006/main">
+  <p:cSld>
+    <p:spTree>
+      <p:nvGrpSpPr>
+        <p:cNvPr id="1" name=""/>
+        <p:cNvGrpSpPr/>
+        <p:nvPr/>
+      </p:nvGrpSpPr>
+      <p:grpSpPr>
+        <a:xfrm>
+          <a:off x="0" y="0"/>
+          <a:ext cx="0" cy="0"/>
+          <a:chOff x="0" y="0"/>
+          <a:chExt cx="0" cy="0"/>
+        </a:xfrm>
+      </p:grpSpPr>
+      <p:grpSp>
+        <p:nvGrpSpPr>
+          <p:cNvPr id="5" name="グループ化 4">
+            <a:extLst>
+              <a:ext uri="{FF2B5EF4-FFF2-40B4-BE49-F238E27FC236}">
+                <a16:creationId xmlns:a16="http://schemas.microsoft.com/office/drawing/2014/main" id="{399A4BD1-76E7-FD7A-D241-B4B4EDC5DA13}"/>
+              </a:ext>
+            </a:extLst>
+          </p:cNvPr>
+          <p:cNvGrpSpPr/>
+          <p:nvPr/>
+        </p:nvGrpSpPr>
+        <p:grpSpPr>
+          <a:xfrm>
+            <a:off x="3505200" y="1476374"/>
+            <a:ext cx="5181600" cy="3905251"/>
+            <a:chOff x="3505200" y="1476374"/>
+            <a:chExt cx="5181600" cy="3905251"/>
+          </a:xfrm>
+        </p:grpSpPr>
+        <p:pic>
+          <p:nvPicPr>
+            <p:cNvPr id="7" name="グラフィックス 6">
+              <a:extLst>
+                <a:ext uri="{FF2B5EF4-FFF2-40B4-BE49-F238E27FC236}">
+                  <a16:creationId xmlns:a16="http://schemas.microsoft.com/office/drawing/2014/main" id="{4CEDFB74-C78A-547E-C2F2-D00FC3B5848A}"/>
+                </a:ext>
+              </a:extLst>
+            </p:cNvPr>
+            <p:cNvPicPr>
+              <a:picLocks noChangeAspect="1"/>
+            </p:cNvPicPr>
+            <p:nvPr/>
+          </p:nvPicPr>
+          <p:blipFill>
+            <a:blip r:embed="rId2">
+              <a:extLst>
+                <a:ext uri="{96DAC541-7B7A-43D3-8B79-37D633B846F1}">
+                  <asvg:svgBlip xmlns:asvg="http://schemas.microsoft.com/office/drawing/2016/SVG/main" r:embed="rId3"/>
+                </a:ext>
+              </a:extLst>
+            </a:blip>
+            <a:stretch>
+              <a:fillRect/>
+            </a:stretch>
+          </p:blipFill>
+          <p:spPr>
+            <a:xfrm>
+              <a:off x="3505200" y="1476375"/>
+              <a:ext cx="5181600" cy="3905250"/>
+            </a:xfrm>
+            <a:prstGeom prst="rect">
+              <a:avLst/>
+            </a:prstGeom>
+          </p:spPr>
+        </p:pic>
+        <p:pic>
+          <p:nvPicPr>
+            <p:cNvPr id="3" name="グラフィックス 2">
+              <a:extLst>
+                <a:ext uri="{FF2B5EF4-FFF2-40B4-BE49-F238E27FC236}">
+                  <a16:creationId xmlns:a16="http://schemas.microsoft.com/office/drawing/2014/main" id="{3FC0B5FC-83D7-6CD9-EB55-D2A72FC0AE07}"/>
+                </a:ext>
+              </a:extLst>
+            </p:cNvPr>
+            <p:cNvPicPr>
+              <a:picLocks noChangeAspect="1"/>
+            </p:cNvPicPr>
+            <p:nvPr/>
+          </p:nvPicPr>
+          <p:blipFill>
+            <a:blip r:embed="rId4">
+              <a:extLst>
+                <a:ext uri="{96DAC541-7B7A-43D3-8B79-37D633B846F1}">
+                  <asvg:svgBlip xmlns:asvg="http://schemas.microsoft.com/office/drawing/2016/SVG/main" r:embed="rId5"/>
+                </a:ext>
+              </a:extLst>
+            </a:blip>
+            <a:srcRect t="12365"/>
+            <a:stretch>
+              <a:fillRect/>
+            </a:stretch>
+          </p:blipFill>
+          <p:spPr>
+            <a:xfrm>
+              <a:off x="4276434" y="1476374"/>
+              <a:ext cx="1991237" cy="3206463"/>
+            </a:xfrm>
+            <a:prstGeom prst="rect">
+              <a:avLst/>
+            </a:prstGeom>
+          </p:spPr>
+        </p:pic>
+      </p:grpSp>
+    </p:spTree>
+    <p:extLst>
+      <p:ext uri="{BB962C8B-B14F-4D97-AF65-F5344CB8AC3E}">
+        <p14:creationId xmlns:p14="http://schemas.microsoft.com/office/powerpoint/2010/main" val="3277369511"/>
+      </p:ext>
+    </p:extLst>
+  </p:cSld>
+  <p:clrMapOvr>
+    <a:masterClrMapping/>
+  </p:clrMapOvr>
+</p:sld>
+</file>
+
+<file path=ppt/slides/slide4.xml><?xml version="1.0" encoding="utf-8"?>
+<p:sld xmlns:a="http://schemas.openxmlformats.org/drawingml/2006/main" xmlns:r="http://schemas.openxmlformats.org/officeDocument/2006/relationships" xmlns:p="http://schemas.openxmlformats.org/presentationml/2006/main">
+  <p:cSld>
+    <p:spTree>
+      <p:nvGrpSpPr>
+        <p:cNvPr id="1" name=""/>
+        <p:cNvGrpSpPr/>
+        <p:nvPr/>
+      </p:nvGrpSpPr>
+      <p:grpSpPr>
+        <a:xfrm>
+          <a:off x="0" y="0"/>
+          <a:ext cx="0" cy="0"/>
+          <a:chOff x="0" y="0"/>
+          <a:chExt cx="0" cy="0"/>
+        </a:xfrm>
+      </p:grpSpPr>
+      <p:grpSp>
+        <p:nvGrpSpPr>
+          <p:cNvPr id="6" name="グループ化 5">
+            <a:extLst>
+              <a:ext uri="{FF2B5EF4-FFF2-40B4-BE49-F238E27FC236}">
+                <a16:creationId xmlns:a16="http://schemas.microsoft.com/office/drawing/2014/main" id="{B9416C81-3F56-7CCE-ECF7-9E76E92D48CA}"/>
+              </a:ext>
+            </a:extLst>
+          </p:cNvPr>
+          <p:cNvGrpSpPr/>
+          <p:nvPr/>
+        </p:nvGrpSpPr>
+        <p:grpSpPr>
+          <a:xfrm>
+            <a:off x="3505200" y="1476375"/>
+            <a:ext cx="5181600" cy="3905250"/>
+            <a:chOff x="3505200" y="1476375"/>
+            <a:chExt cx="5181600" cy="3905250"/>
+          </a:xfrm>
+        </p:grpSpPr>
+        <p:pic>
+          <p:nvPicPr>
+            <p:cNvPr id="3" name="グラフィックス 2">
+              <a:extLst>
+                <a:ext uri="{FF2B5EF4-FFF2-40B4-BE49-F238E27FC236}">
+                  <a16:creationId xmlns:a16="http://schemas.microsoft.com/office/drawing/2014/main" id="{327E77F6-46BE-E48B-443E-016D50CBE6B7}"/>
+                </a:ext>
+              </a:extLst>
+            </p:cNvPr>
+            <p:cNvPicPr>
+              <a:picLocks noChangeAspect="1"/>
+            </p:cNvPicPr>
+            <p:nvPr/>
+          </p:nvPicPr>
+          <p:blipFill>
+            <a:blip r:embed="rId2">
+              <a:extLst>
+                <a:ext uri="{96DAC541-7B7A-43D3-8B79-37D633B846F1}">
+                  <asvg:svgBlip xmlns:asvg="http://schemas.microsoft.com/office/drawing/2016/SVG/main" r:embed="rId3"/>
+                </a:ext>
+              </a:extLst>
+            </a:blip>
+            <a:stretch>
+              <a:fillRect/>
+            </a:stretch>
+          </p:blipFill>
+          <p:spPr>
+            <a:xfrm>
+              <a:off x="3505200" y="1476375"/>
+              <a:ext cx="5181600" cy="3905250"/>
+            </a:xfrm>
+            <a:prstGeom prst="rect">
+              <a:avLst/>
+            </a:prstGeom>
+          </p:spPr>
+        </p:pic>
+        <p:pic>
+          <p:nvPicPr>
+            <p:cNvPr id="5" name="グラフィックス 4">
+              <a:extLst>
+                <a:ext uri="{FF2B5EF4-FFF2-40B4-BE49-F238E27FC236}">
+                  <a16:creationId xmlns:a16="http://schemas.microsoft.com/office/drawing/2014/main" id="{D2811091-647F-044A-1C3F-C98C9E8641EA}"/>
+                </a:ext>
+              </a:extLst>
+            </p:cNvPr>
+            <p:cNvPicPr>
+              <a:picLocks noChangeAspect="1"/>
+            </p:cNvPicPr>
+            <p:nvPr/>
+          </p:nvPicPr>
+          <p:blipFill>
+            <a:blip r:embed="rId4">
+              <a:extLst>
+                <a:ext uri="{96DAC541-7B7A-43D3-8B79-37D633B846F1}">
+                  <asvg:svgBlip xmlns:asvg="http://schemas.microsoft.com/office/drawing/2016/SVG/main" r:embed="rId5"/>
+                </a:ext>
+              </a:extLst>
+            </a:blip>
+            <a:srcRect t="12313"/>
+            <a:stretch>
+              <a:fillRect/>
+            </a:stretch>
+          </p:blipFill>
+          <p:spPr>
+            <a:xfrm>
+              <a:off x="4223327" y="1476375"/>
+              <a:ext cx="2098532" cy="3197225"/>
+            </a:xfrm>
+            <a:prstGeom prst="rect">
+              <a:avLst/>
+            </a:prstGeom>
+          </p:spPr>
+        </p:pic>
+      </p:grpSp>
+    </p:spTree>
+    <p:extLst>
+      <p:ext uri="{BB962C8B-B14F-4D97-AF65-F5344CB8AC3E}">
+        <p14:creationId xmlns:p14="http://schemas.microsoft.com/office/powerpoint/2010/main" val="3987183577"/>
+      </p:ext>
+    </p:extLst>
+  </p:cSld>
+  <p:clrMapOvr>
+    <a:masterClrMapping/>
+  </p:clrMapOvr>
+</p:sld>
+</file>
+
 <file path=ppt/theme/theme1.xml><?xml version="1.0" encoding="utf-8"?>
 <a:theme xmlns:a="http://schemas.openxmlformats.org/drawingml/2006/main" name="Office テーマ">
   <a:themeElements>
@@ -1704,23 +1954,6 @@
 </file>
 
 <file path=customXml/item1.xml><?xml version="1.0" encoding="utf-8"?>
-<p:properties xmlns:p="http://schemas.microsoft.com/office/2006/metadata/properties" xmlns:xsi="http://www.w3.org/2001/XMLSchema-instance" xmlns:pc="http://schemas.microsoft.com/office/infopath/2007/PartnerControls">
-  <documentManagement>
-    <_activity xmlns="a4af94e1-c1fc-4949-80ee-6d0f2b25a4fd" xsi:nil="true"/>
-  </documentManagement>
-</p:properties>
-</file>
-
-<file path=customXml/item2.xml><?xml version="1.0" encoding="utf-8"?>
-<?mso-contentType ?>
-<FormTemplates xmlns="http://schemas.microsoft.com/sharepoint/v3/contenttype/forms">
-  <Display>DocumentLibraryForm</Display>
-  <Edit>DocumentLibraryForm</Edit>
-  <New>DocumentLibraryForm</New>
-</FormTemplates>
-</file>
-
-<file path=customXml/item3.xml><?xml version="1.0" encoding="utf-8"?>
 <ct:contentTypeSchema xmlns:ct="http://schemas.microsoft.com/office/2006/metadata/contentType" xmlns:ma="http://schemas.microsoft.com/office/2006/metadata/properties/metaAttributes" ct:_="" ma:_="" ma:contentTypeName="ドキュメント" ma:contentTypeID="0x01010001977AFA83253148B9A11DE7E57585DA" ma:contentTypeVersion="18" ma:contentTypeDescription="新しいドキュメントを作成します。" ma:contentTypeScope="" ma:versionID="c33b06d1a59709aebae5ef90ac421293">
   <xsd:schema xmlns:xsd="http://www.w3.org/2001/XMLSchema" xmlns:xs="http://www.w3.org/2001/XMLSchema" xmlns:p="http://schemas.microsoft.com/office/2006/metadata/properties" xmlns:ns3="a4af94e1-c1fc-4949-80ee-6d0f2b25a4fd" xmlns:ns4="6e67e666-c3e9-4393-909a-82e166baf630" targetNamespace="http://schemas.microsoft.com/office/2006/metadata/properties" ma:root="true" ma:fieldsID="5929bf68818a63ba6b6aa8003b159019" ns3:_="" ns4:_="">
     <xsd:import namespace="a4af94e1-c1fc-4949-80ee-6d0f2b25a4fd"/>
@@ -1973,32 +2206,24 @@
 </ct:contentTypeSchema>
 </file>
 
-<file path=customXml/itemProps1.xml><?xml version="1.0" encoding="utf-8"?>
-<ds:datastoreItem xmlns:ds="http://schemas.openxmlformats.org/officeDocument/2006/customXml" ds:itemID="{B536A920-CFA6-45F7-AAF4-D5E5B2A432A5}">
-  <ds:schemaRefs>
-    <ds:schemaRef ds:uri="http://schemas.microsoft.com/office/infopath/2007/PartnerControls"/>
-    <ds:schemaRef ds:uri="http://schemas.microsoft.com/office/2006/metadata/properties"/>
-    <ds:schemaRef ds:uri="http://schemas.microsoft.com/office/2006/documentManagement/types"/>
-    <ds:schemaRef ds:uri="http://purl.org/dc/elements/1.1/"/>
-    <ds:schemaRef ds:uri="http://purl.org/dc/dcmitype/"/>
-    <ds:schemaRef ds:uri="http://www.w3.org/XML/1998/namespace"/>
-    <ds:schemaRef ds:uri="a4af94e1-c1fc-4949-80ee-6d0f2b25a4fd"/>
-    <ds:schemaRef ds:uri="http://schemas.openxmlformats.org/package/2006/metadata/core-properties"/>
-    <ds:schemaRef ds:uri="6e67e666-c3e9-4393-909a-82e166baf630"/>
-    <ds:schemaRef ds:uri="http://purl.org/dc/terms/"/>
-  </ds:schemaRefs>
-</ds:datastoreItem>
+<file path=customXml/item2.xml><?xml version="1.0" encoding="utf-8"?>
+<?mso-contentType ?>
+<FormTemplates xmlns="http://schemas.microsoft.com/sharepoint/v3/contenttype/forms">
+  <Display>DocumentLibraryForm</Display>
+  <Edit>DocumentLibraryForm</Edit>
+  <New>DocumentLibraryForm</New>
+</FormTemplates>
 </file>
 
-<file path=customXml/itemProps2.xml><?xml version="1.0" encoding="utf-8"?>
-<ds:datastoreItem xmlns:ds="http://schemas.openxmlformats.org/officeDocument/2006/customXml" ds:itemID="{A32B4A66-F859-40E3-BB80-2813DE49481C}">
-  <ds:schemaRefs>
-    <ds:schemaRef ds:uri="http://schemas.microsoft.com/sharepoint/v3/contenttype/forms"/>
-  </ds:schemaRefs>
-</ds:datastoreItem>
+<file path=customXml/item3.xml><?xml version="1.0" encoding="utf-8"?>
+<p:properties xmlns:p="http://schemas.microsoft.com/office/2006/metadata/properties" xmlns:xsi="http://www.w3.org/2001/XMLSchema-instance" xmlns:pc="http://schemas.microsoft.com/office/infopath/2007/PartnerControls">
+  <documentManagement>
+    <_activity xmlns="a4af94e1-c1fc-4949-80ee-6d0f2b25a4fd" xsi:nil="true"/>
+  </documentManagement>
+</p:properties>
 </file>
 
-<file path=customXml/itemProps3.xml><?xml version="1.0" encoding="utf-8"?>
+<file path=customXml/itemProps1.xml><?xml version="1.0" encoding="utf-8"?>
 <ds:datastoreItem xmlns:ds="http://schemas.openxmlformats.org/officeDocument/2006/customXml" ds:itemID="{4CF7E964-C6F6-44DA-86BC-C4F5D23786D9}">
   <ds:schemaRefs>
     <ds:schemaRef ds:uri="http://schemas.microsoft.com/office/2006/metadata/contentType"/>
@@ -2015,4 +2240,29 @@
     <ds:schemaRef ds:uri="http://schemas.microsoft.com/internal/obd"/>
   </ds:schemaRefs>
 </ds:datastoreItem>
+</file>
+
+<file path=customXml/itemProps2.xml><?xml version="1.0" encoding="utf-8"?>
+<ds:datastoreItem xmlns:ds="http://schemas.openxmlformats.org/officeDocument/2006/customXml" ds:itemID="{A32B4A66-F859-40E3-BB80-2813DE49481C}">
+  <ds:schemaRefs>
+    <ds:schemaRef ds:uri="http://schemas.microsoft.com/sharepoint/v3/contenttype/forms"/>
+  </ds:schemaRefs>
+</ds:datastoreItem>
+</file>
+
+<file path=customXml/itemProps3.xml><?xml version="1.0" encoding="utf-8"?>
+<ds:datastoreItem xmlns:ds="http://schemas.openxmlformats.org/officeDocument/2006/customXml" ds:itemID="{B536A920-CFA6-45F7-AAF4-D5E5B2A432A5}">
+  <ds:schemaRefs>
+    <ds:schemaRef ds:uri="http://schemas.microsoft.com/office/infopath/2007/PartnerControls"/>
+    <ds:schemaRef ds:uri="http://schemas.microsoft.com/office/2006/metadata/properties"/>
+    <ds:schemaRef ds:uri="http://schemas.microsoft.com/office/2006/documentManagement/types"/>
+    <ds:schemaRef ds:uri="http://purl.org/dc/elements/1.1/"/>
+    <ds:schemaRef ds:uri="http://purl.org/dc/dcmitype/"/>
+    <ds:schemaRef ds:uri="http://www.w3.org/XML/1998/namespace"/>
+    <ds:schemaRef ds:uri="a4af94e1-c1fc-4949-80ee-6d0f2b25a4fd"/>
+    <ds:schemaRef ds:uri="http://schemas.openxmlformats.org/package/2006/metadata/core-properties"/>
+    <ds:schemaRef ds:uri="6e67e666-c3e9-4393-909a-82e166baf630"/>
+    <ds:schemaRef ds:uri="http://purl.org/dc/terms/"/>
+  </ds:schemaRefs>
+</ds:datastoreItem>
 </file>
--- a/figs/slip_length_summary/output/fig.pptx
+++ b/figs/slip_length_summary/output/fig.pptx
@@ -5,13 +5,15 @@
     <p:sldMasterId id="2147483648" r:id="rId4"/>
   </p:sldMasterIdLst>
   <p:notesMasterIdLst>
-    <p:notesMasterId r:id="rId9"/>
+    <p:notesMasterId r:id="rId11"/>
   </p:notesMasterIdLst>
   <p:sldIdLst>
     <p:sldId id="257" r:id="rId5"/>
     <p:sldId id="258" r:id="rId6"/>
     <p:sldId id="259" r:id="rId7"/>
     <p:sldId id="260" r:id="rId8"/>
+    <p:sldId id="261" r:id="rId9"/>
+    <p:sldId id="262" r:id="rId10"/>
   </p:sldIdLst>
   <p:sldSz cx="12192000" cy="6858000"/>
   <p:notesSz cx="6858000" cy="9144000"/>
@@ -203,7 +205,7 @@
           <a:p>
             <a:fld id="{58ACC529-06C9-45FD-94D7-552AA2810228}" type="datetimeFigureOut">
               <a:rPr kumimoji="1" lang="ja-JP" altLang="en-US" smtClean="0"/>
-              <a:t>2026/2/26</a:t>
+              <a:t>2026/2/27</a:t>
             </a:fld>
             <a:endParaRPr kumimoji="1" lang="ja-JP" altLang="en-US"/>
           </a:p>
@@ -1323,6 +1325,254 @@
 </p:sld>
 </file>
 
+<file path=ppt/slides/slide5.xml><?xml version="1.0" encoding="utf-8"?>
+<p:sld xmlns:a="http://schemas.openxmlformats.org/drawingml/2006/main" xmlns:r="http://schemas.openxmlformats.org/officeDocument/2006/relationships" xmlns:p="http://schemas.openxmlformats.org/presentationml/2006/main">
+  <p:cSld>
+    <p:spTree>
+      <p:nvGrpSpPr>
+        <p:cNvPr id="1" name=""/>
+        <p:cNvGrpSpPr/>
+        <p:nvPr/>
+      </p:nvGrpSpPr>
+      <p:grpSpPr>
+        <a:xfrm>
+          <a:off x="0" y="0"/>
+          <a:ext cx="0" cy="0"/>
+          <a:chOff x="0" y="0"/>
+          <a:chExt cx="0" cy="0"/>
+        </a:xfrm>
+      </p:grpSpPr>
+      <p:grpSp>
+        <p:nvGrpSpPr>
+          <p:cNvPr id="6" name="グループ化 5">
+            <a:extLst>
+              <a:ext uri="{FF2B5EF4-FFF2-40B4-BE49-F238E27FC236}">
+                <a16:creationId xmlns:a16="http://schemas.microsoft.com/office/drawing/2014/main" id="{0CD27D9C-56BD-2F84-5B57-96E545AFC3F7}"/>
+              </a:ext>
+            </a:extLst>
+          </p:cNvPr>
+          <p:cNvGrpSpPr/>
+          <p:nvPr/>
+        </p:nvGrpSpPr>
+        <p:grpSpPr>
+          <a:xfrm>
+            <a:off x="3505200" y="1476375"/>
+            <a:ext cx="5181600" cy="3905250"/>
+            <a:chOff x="3505200" y="1476375"/>
+            <a:chExt cx="5181600" cy="3905250"/>
+          </a:xfrm>
+        </p:grpSpPr>
+        <p:pic>
+          <p:nvPicPr>
+            <p:cNvPr id="3" name="グラフィックス 2">
+              <a:extLst>
+                <a:ext uri="{FF2B5EF4-FFF2-40B4-BE49-F238E27FC236}">
+                  <a16:creationId xmlns:a16="http://schemas.microsoft.com/office/drawing/2014/main" id="{402EAB7F-B5C8-C73D-6752-8D282AE767B6}"/>
+                </a:ext>
+              </a:extLst>
+            </p:cNvPr>
+            <p:cNvPicPr>
+              <a:picLocks noChangeAspect="1"/>
+            </p:cNvPicPr>
+            <p:nvPr/>
+          </p:nvPicPr>
+          <p:blipFill>
+            <a:blip r:embed="rId2">
+              <a:extLst>
+                <a:ext uri="{96DAC541-7B7A-43D3-8B79-37D633B846F1}">
+                  <asvg:svgBlip xmlns:asvg="http://schemas.microsoft.com/office/drawing/2016/SVG/main" r:embed="rId3"/>
+                </a:ext>
+              </a:extLst>
+            </a:blip>
+            <a:stretch>
+              <a:fillRect/>
+            </a:stretch>
+          </p:blipFill>
+          <p:spPr>
+            <a:xfrm>
+              <a:off x="3505200" y="1476375"/>
+              <a:ext cx="5181600" cy="3905250"/>
+            </a:xfrm>
+            <a:prstGeom prst="rect">
+              <a:avLst/>
+            </a:prstGeom>
+          </p:spPr>
+        </p:pic>
+        <p:pic>
+          <p:nvPicPr>
+            <p:cNvPr id="5" name="グラフィックス 4">
+              <a:extLst>
+                <a:ext uri="{FF2B5EF4-FFF2-40B4-BE49-F238E27FC236}">
+                  <a16:creationId xmlns:a16="http://schemas.microsoft.com/office/drawing/2014/main" id="{570E5D0D-690E-3852-EA4A-05D8D650F339}"/>
+                </a:ext>
+              </a:extLst>
+            </p:cNvPr>
+            <p:cNvPicPr>
+              <a:picLocks noChangeAspect="1"/>
+            </p:cNvPicPr>
+            <p:nvPr/>
+          </p:nvPicPr>
+          <p:blipFill>
+            <a:blip r:embed="rId4">
+              <a:extLst>
+                <a:ext uri="{96DAC541-7B7A-43D3-8B79-37D633B846F1}">
+                  <asvg:svgBlip xmlns:asvg="http://schemas.microsoft.com/office/drawing/2016/SVG/main" r:embed="rId5"/>
+                </a:ext>
+              </a:extLst>
+            </a:blip>
+            <a:srcRect t="11215"/>
+            <a:stretch>
+              <a:fillRect/>
+            </a:stretch>
+          </p:blipFill>
+          <p:spPr>
+            <a:xfrm>
+              <a:off x="4371110" y="1476375"/>
+              <a:ext cx="1750556" cy="3160278"/>
+            </a:xfrm>
+            <a:prstGeom prst="rect">
+              <a:avLst/>
+            </a:prstGeom>
+          </p:spPr>
+        </p:pic>
+      </p:grpSp>
+    </p:spTree>
+    <p:extLst>
+      <p:ext uri="{BB962C8B-B14F-4D97-AF65-F5344CB8AC3E}">
+        <p14:creationId xmlns:p14="http://schemas.microsoft.com/office/powerpoint/2010/main" val="1919355585"/>
+      </p:ext>
+    </p:extLst>
+  </p:cSld>
+  <p:clrMapOvr>
+    <a:masterClrMapping/>
+  </p:clrMapOvr>
+</p:sld>
+</file>
+
+<file path=ppt/slides/slide6.xml><?xml version="1.0" encoding="utf-8"?>
+<p:sld xmlns:a="http://schemas.openxmlformats.org/drawingml/2006/main" xmlns:r="http://schemas.openxmlformats.org/officeDocument/2006/relationships" xmlns:p="http://schemas.openxmlformats.org/presentationml/2006/main">
+  <p:cSld>
+    <p:spTree>
+      <p:nvGrpSpPr>
+        <p:cNvPr id="1" name=""/>
+        <p:cNvGrpSpPr/>
+        <p:nvPr/>
+      </p:nvGrpSpPr>
+      <p:grpSpPr>
+        <a:xfrm>
+          <a:off x="0" y="0"/>
+          <a:ext cx="0" cy="0"/>
+          <a:chOff x="0" y="0"/>
+          <a:chExt cx="0" cy="0"/>
+        </a:xfrm>
+      </p:grpSpPr>
+      <p:grpSp>
+        <p:nvGrpSpPr>
+          <p:cNvPr id="6" name="グループ化 5">
+            <a:extLst>
+              <a:ext uri="{FF2B5EF4-FFF2-40B4-BE49-F238E27FC236}">
+                <a16:creationId xmlns:a16="http://schemas.microsoft.com/office/drawing/2014/main" id="{5A953981-0F91-854D-B17E-11ECDD8999BC}"/>
+              </a:ext>
+            </a:extLst>
+          </p:cNvPr>
+          <p:cNvGrpSpPr/>
+          <p:nvPr/>
+        </p:nvGrpSpPr>
+        <p:grpSpPr>
+          <a:xfrm>
+            <a:off x="3505200" y="1476375"/>
+            <a:ext cx="5181600" cy="3905250"/>
+            <a:chOff x="3505200" y="1476375"/>
+            <a:chExt cx="5181600" cy="3905250"/>
+          </a:xfrm>
+        </p:grpSpPr>
+        <p:pic>
+          <p:nvPicPr>
+            <p:cNvPr id="3" name="グラフィックス 2">
+              <a:extLst>
+                <a:ext uri="{FF2B5EF4-FFF2-40B4-BE49-F238E27FC236}">
+                  <a16:creationId xmlns:a16="http://schemas.microsoft.com/office/drawing/2014/main" id="{7596AC61-77E2-8238-E365-56C6660A0F34}"/>
+                </a:ext>
+              </a:extLst>
+            </p:cNvPr>
+            <p:cNvPicPr>
+              <a:picLocks noChangeAspect="1"/>
+            </p:cNvPicPr>
+            <p:nvPr/>
+          </p:nvPicPr>
+          <p:blipFill>
+            <a:blip r:embed="rId2">
+              <a:extLst>
+                <a:ext uri="{96DAC541-7B7A-43D3-8B79-37D633B846F1}">
+                  <asvg:svgBlip xmlns:asvg="http://schemas.microsoft.com/office/drawing/2016/SVG/main" r:embed="rId3"/>
+                </a:ext>
+              </a:extLst>
+            </a:blip>
+            <a:srcRect t="11613"/>
+            <a:stretch>
+              <a:fillRect/>
+            </a:stretch>
+          </p:blipFill>
+          <p:spPr>
+            <a:xfrm>
+              <a:off x="4389583" y="1476375"/>
+              <a:ext cx="1768726" cy="3178754"/>
+            </a:xfrm>
+            <a:prstGeom prst="rect">
+              <a:avLst/>
+            </a:prstGeom>
+          </p:spPr>
+        </p:pic>
+        <p:pic>
+          <p:nvPicPr>
+            <p:cNvPr id="5" name="グラフィックス 4">
+              <a:extLst>
+                <a:ext uri="{FF2B5EF4-FFF2-40B4-BE49-F238E27FC236}">
+                  <a16:creationId xmlns:a16="http://schemas.microsoft.com/office/drawing/2014/main" id="{6E2C4C3C-9158-EE73-228B-852F86BA0F1E}"/>
+                </a:ext>
+              </a:extLst>
+            </p:cNvPr>
+            <p:cNvPicPr>
+              <a:picLocks noChangeAspect="1"/>
+            </p:cNvPicPr>
+            <p:nvPr/>
+          </p:nvPicPr>
+          <p:blipFill>
+            <a:blip r:embed="rId4">
+              <a:extLst>
+                <a:ext uri="{96DAC541-7B7A-43D3-8B79-37D633B846F1}">
+                  <asvg:svgBlip xmlns:asvg="http://schemas.microsoft.com/office/drawing/2016/SVG/main" r:embed="rId5"/>
+                </a:ext>
+              </a:extLst>
+            </a:blip>
+            <a:stretch>
+              <a:fillRect/>
+            </a:stretch>
+          </p:blipFill>
+          <p:spPr>
+            <a:xfrm>
+              <a:off x="3505200" y="1476375"/>
+              <a:ext cx="5181600" cy="3905250"/>
+            </a:xfrm>
+            <a:prstGeom prst="rect">
+              <a:avLst/>
+            </a:prstGeom>
+          </p:spPr>
+        </p:pic>
+      </p:grpSp>
+    </p:spTree>
+    <p:extLst>
+      <p:ext uri="{BB962C8B-B14F-4D97-AF65-F5344CB8AC3E}">
+        <p14:creationId xmlns:p14="http://schemas.microsoft.com/office/powerpoint/2010/main" val="2104740289"/>
+      </p:ext>
+    </p:extLst>
+  </p:cSld>
+  <p:clrMapOvr>
+    <a:masterClrMapping/>
+  </p:clrMapOvr>
+</p:sld>
+</file>
+
 <file path=ppt/theme/theme1.xml><?xml version="1.0" encoding="utf-8"?>
 <a:theme xmlns:a="http://schemas.openxmlformats.org/drawingml/2006/main" name="Office テーマ">
   <a:themeElements>

--- a/figs/slip_length_summary/output/fig.pptx
+++ b/figs/slip_length_summary/output/fig.pptx
@@ -5,7 +5,7 @@
     <p:sldMasterId id="2147483648" r:id="rId4"/>
   </p:sldMasterIdLst>
   <p:notesMasterIdLst>
-    <p:notesMasterId r:id="rId11"/>
+    <p:notesMasterId r:id="rId13"/>
   </p:notesMasterIdLst>
   <p:sldIdLst>
     <p:sldId id="257" r:id="rId5"/>
@@ -14,6 +14,8 @@
     <p:sldId id="260" r:id="rId8"/>
     <p:sldId id="261" r:id="rId9"/>
     <p:sldId id="262" r:id="rId10"/>
+    <p:sldId id="263" r:id="rId11"/>
+    <p:sldId id="264" r:id="rId12"/>
   </p:sldIdLst>
   <p:sldSz cx="12192000" cy="6858000"/>
   <p:notesSz cx="6858000" cy="9144000"/>
@@ -205,7 +207,7 @@
           <a:p>
             <a:fld id="{58ACC529-06C9-45FD-94D7-552AA2810228}" type="datetimeFigureOut">
               <a:rPr kumimoji="1" lang="ja-JP" altLang="en-US" smtClean="0"/>
-              <a:t>2026/2/27</a:t>
+              <a:t>2026/3/5</a:t>
             </a:fld>
             <a:endParaRPr kumimoji="1" lang="ja-JP" altLang="en-US"/>
           </a:p>
@@ -1573,6 +1575,254 @@
 </p:sld>
 </file>
 
+<file path=ppt/slides/slide7.xml><?xml version="1.0" encoding="utf-8"?>
+<p:sld xmlns:a="http://schemas.openxmlformats.org/drawingml/2006/main" xmlns:r="http://schemas.openxmlformats.org/officeDocument/2006/relationships" xmlns:p="http://schemas.openxmlformats.org/presentationml/2006/main">
+  <p:cSld>
+    <p:spTree>
+      <p:nvGrpSpPr>
+        <p:cNvPr id="1" name=""/>
+        <p:cNvGrpSpPr/>
+        <p:nvPr/>
+      </p:nvGrpSpPr>
+      <p:grpSpPr>
+        <a:xfrm>
+          <a:off x="0" y="0"/>
+          <a:ext cx="0" cy="0"/>
+          <a:chOff x="0" y="0"/>
+          <a:chExt cx="0" cy="0"/>
+        </a:xfrm>
+      </p:grpSpPr>
+      <p:grpSp>
+        <p:nvGrpSpPr>
+          <p:cNvPr id="6" name="グループ化 5">
+            <a:extLst>
+              <a:ext uri="{FF2B5EF4-FFF2-40B4-BE49-F238E27FC236}">
+                <a16:creationId xmlns:a16="http://schemas.microsoft.com/office/drawing/2014/main" id="{3CC7D2EC-4871-74C0-5458-7109D9187D15}"/>
+              </a:ext>
+            </a:extLst>
+          </p:cNvPr>
+          <p:cNvGrpSpPr/>
+          <p:nvPr/>
+        </p:nvGrpSpPr>
+        <p:grpSpPr>
+          <a:xfrm>
+            <a:off x="2191328" y="1467000"/>
+            <a:ext cx="7467600" cy="3984619"/>
+            <a:chOff x="2191328" y="1467000"/>
+            <a:chExt cx="7467600" cy="3984619"/>
+          </a:xfrm>
+        </p:grpSpPr>
+        <p:pic>
+          <p:nvPicPr>
+            <p:cNvPr id="3" name="グラフィックス 2">
+              <a:extLst>
+                <a:ext uri="{FF2B5EF4-FFF2-40B4-BE49-F238E27FC236}">
+                  <a16:creationId xmlns:a16="http://schemas.microsoft.com/office/drawing/2014/main" id="{7025F737-E8DA-5FCE-61F9-063C607287FC}"/>
+                </a:ext>
+              </a:extLst>
+            </p:cNvPr>
+            <p:cNvPicPr>
+              <a:picLocks noChangeAspect="1"/>
+            </p:cNvPicPr>
+            <p:nvPr/>
+          </p:nvPicPr>
+          <p:blipFill>
+            <a:blip r:embed="rId2">
+              <a:extLst>
+                <a:ext uri="{96DAC541-7B7A-43D3-8B79-37D633B846F1}">
+                  <asvg:svgBlip xmlns:asvg="http://schemas.microsoft.com/office/drawing/2016/SVG/main" r:embed="rId3"/>
+                </a:ext>
+              </a:extLst>
+            </a:blip>
+            <a:srcRect t="11127" b="11221"/>
+            <a:stretch>
+              <a:fillRect/>
+            </a:stretch>
+          </p:blipFill>
+          <p:spPr>
+            <a:xfrm>
+              <a:off x="7372928" y="1467000"/>
+              <a:ext cx="2286000" cy="3786909"/>
+            </a:xfrm>
+            <a:prstGeom prst="rect">
+              <a:avLst/>
+            </a:prstGeom>
+          </p:spPr>
+        </p:pic>
+        <p:pic>
+          <p:nvPicPr>
+            <p:cNvPr id="5" name="グラフィックス 4">
+              <a:extLst>
+                <a:ext uri="{FF2B5EF4-FFF2-40B4-BE49-F238E27FC236}">
+                  <a16:creationId xmlns:a16="http://schemas.microsoft.com/office/drawing/2014/main" id="{EB065DD4-3290-91A7-0632-CEF07F831A4B}"/>
+                </a:ext>
+              </a:extLst>
+            </p:cNvPr>
+            <p:cNvPicPr>
+              <a:picLocks noChangeAspect="1"/>
+            </p:cNvPicPr>
+            <p:nvPr/>
+          </p:nvPicPr>
+          <p:blipFill>
+            <a:blip r:embed="rId4">
+              <a:extLst>
+                <a:ext uri="{96DAC541-7B7A-43D3-8B79-37D633B846F1}">
+                  <asvg:svgBlip xmlns:asvg="http://schemas.microsoft.com/office/drawing/2016/SVG/main" r:embed="rId5"/>
+                </a:ext>
+              </a:extLst>
+            </a:blip>
+            <a:stretch>
+              <a:fillRect/>
+            </a:stretch>
+          </p:blipFill>
+          <p:spPr>
+            <a:xfrm>
+              <a:off x="2191328" y="1546369"/>
+              <a:ext cx="5181600" cy="3905250"/>
+            </a:xfrm>
+            <a:prstGeom prst="rect">
+              <a:avLst/>
+            </a:prstGeom>
+          </p:spPr>
+        </p:pic>
+      </p:grpSp>
+    </p:spTree>
+    <p:extLst>
+      <p:ext uri="{BB962C8B-B14F-4D97-AF65-F5344CB8AC3E}">
+        <p14:creationId xmlns:p14="http://schemas.microsoft.com/office/powerpoint/2010/main" val="3014000950"/>
+      </p:ext>
+    </p:extLst>
+  </p:cSld>
+  <p:clrMapOvr>
+    <a:masterClrMapping/>
+  </p:clrMapOvr>
+</p:sld>
+</file>
+
+<file path=ppt/slides/slide8.xml><?xml version="1.0" encoding="utf-8"?>
+<p:sld xmlns:a="http://schemas.openxmlformats.org/drawingml/2006/main" xmlns:r="http://schemas.openxmlformats.org/officeDocument/2006/relationships" xmlns:p="http://schemas.openxmlformats.org/presentationml/2006/main">
+  <p:cSld>
+    <p:spTree>
+      <p:nvGrpSpPr>
+        <p:cNvPr id="1" name=""/>
+        <p:cNvGrpSpPr/>
+        <p:nvPr/>
+      </p:nvGrpSpPr>
+      <p:grpSpPr>
+        <a:xfrm>
+          <a:off x="0" y="0"/>
+          <a:ext cx="0" cy="0"/>
+          <a:chOff x="0" y="0"/>
+          <a:chExt cx="0" cy="0"/>
+        </a:xfrm>
+      </p:grpSpPr>
+      <p:grpSp>
+        <p:nvGrpSpPr>
+          <p:cNvPr id="6" name="グループ化 5">
+            <a:extLst>
+              <a:ext uri="{FF2B5EF4-FFF2-40B4-BE49-F238E27FC236}">
+                <a16:creationId xmlns:a16="http://schemas.microsoft.com/office/drawing/2014/main" id="{9F38CBE9-0FD0-6090-3F74-C84754C5391A}"/>
+              </a:ext>
+            </a:extLst>
+          </p:cNvPr>
+          <p:cNvGrpSpPr/>
+          <p:nvPr/>
+        </p:nvGrpSpPr>
+        <p:grpSpPr>
+          <a:xfrm>
+            <a:off x="2258291" y="1551712"/>
+            <a:ext cx="7467600" cy="4054763"/>
+            <a:chOff x="2258291" y="1551712"/>
+            <a:chExt cx="7467600" cy="4054763"/>
+          </a:xfrm>
+        </p:grpSpPr>
+        <p:pic>
+          <p:nvPicPr>
+            <p:cNvPr id="3" name="グラフィックス 2">
+              <a:extLst>
+                <a:ext uri="{FF2B5EF4-FFF2-40B4-BE49-F238E27FC236}">
+                  <a16:creationId xmlns:a16="http://schemas.microsoft.com/office/drawing/2014/main" id="{3BCBC998-39E9-9CB4-5A29-899CD1D214C0}"/>
+                </a:ext>
+              </a:extLst>
+            </p:cNvPr>
+            <p:cNvPicPr>
+              <a:picLocks noChangeAspect="1"/>
+            </p:cNvPicPr>
+            <p:nvPr/>
+          </p:nvPicPr>
+          <p:blipFill>
+            <a:blip r:embed="rId2">
+              <a:extLst>
+                <a:ext uri="{96DAC541-7B7A-43D3-8B79-37D633B846F1}">
+                  <asvg:svgBlip xmlns:asvg="http://schemas.microsoft.com/office/drawing/2016/SVG/main" r:embed="rId3"/>
+                </a:ext>
+              </a:extLst>
+            </a:blip>
+            <a:srcRect t="11967" b="11880"/>
+            <a:stretch>
+              <a:fillRect/>
+            </a:stretch>
+          </p:blipFill>
+          <p:spPr>
+            <a:xfrm>
+              <a:off x="7439891" y="1551712"/>
+              <a:ext cx="2286000" cy="4054763"/>
+            </a:xfrm>
+            <a:prstGeom prst="rect">
+              <a:avLst/>
+            </a:prstGeom>
+          </p:spPr>
+        </p:pic>
+        <p:pic>
+          <p:nvPicPr>
+            <p:cNvPr id="5" name="グラフィックス 4">
+              <a:extLst>
+                <a:ext uri="{FF2B5EF4-FFF2-40B4-BE49-F238E27FC236}">
+                  <a16:creationId xmlns:a16="http://schemas.microsoft.com/office/drawing/2014/main" id="{9DF805C4-B894-0B0E-EF03-75E4CC6AF5C3}"/>
+                </a:ext>
+              </a:extLst>
+            </p:cNvPr>
+            <p:cNvPicPr>
+              <a:picLocks noChangeAspect="1"/>
+            </p:cNvPicPr>
+            <p:nvPr/>
+          </p:nvPicPr>
+          <p:blipFill>
+            <a:blip r:embed="rId4">
+              <a:extLst>
+                <a:ext uri="{96DAC541-7B7A-43D3-8B79-37D633B846F1}">
+                  <asvg:svgBlip xmlns:asvg="http://schemas.microsoft.com/office/drawing/2016/SVG/main" r:embed="rId5"/>
+                </a:ext>
+              </a:extLst>
+            </a:blip>
+            <a:stretch>
+              <a:fillRect/>
+            </a:stretch>
+          </p:blipFill>
+          <p:spPr>
+            <a:xfrm>
+              <a:off x="2258291" y="1688811"/>
+              <a:ext cx="5181600" cy="3905250"/>
+            </a:xfrm>
+            <a:prstGeom prst="rect">
+              <a:avLst/>
+            </a:prstGeom>
+          </p:spPr>
+        </p:pic>
+      </p:grpSp>
+    </p:spTree>
+    <p:extLst>
+      <p:ext uri="{BB962C8B-B14F-4D97-AF65-F5344CB8AC3E}">
+        <p14:creationId xmlns:p14="http://schemas.microsoft.com/office/powerpoint/2010/main" val="3311656778"/>
+      </p:ext>
+    </p:extLst>
+  </p:cSld>
+  <p:clrMapOvr>
+    <a:masterClrMapping/>
+  </p:clrMapOvr>
+</p:sld>
+</file>
+
 <file path=ppt/theme/theme1.xml><?xml version="1.0" encoding="utf-8"?>
 <a:theme xmlns:a="http://schemas.openxmlformats.org/drawingml/2006/main" name="Office テーマ">
   <a:themeElements>
@@ -2457,20 +2707,20 @@
 </file>
 
 <file path=customXml/item2.xml><?xml version="1.0" encoding="utf-8"?>
+<p:properties xmlns:p="http://schemas.microsoft.com/office/2006/metadata/properties" xmlns:xsi="http://www.w3.org/2001/XMLSchema-instance" xmlns:pc="http://schemas.microsoft.com/office/infopath/2007/PartnerControls">
+  <documentManagement>
+    <_activity xmlns="a4af94e1-c1fc-4949-80ee-6d0f2b25a4fd" xsi:nil="true"/>
+  </documentManagement>
+</p:properties>
+</file>
+
+<file path=customXml/item3.xml><?xml version="1.0" encoding="utf-8"?>
 <?mso-contentType ?>
 <FormTemplates xmlns="http://schemas.microsoft.com/sharepoint/v3/contenttype/forms">
   <Display>DocumentLibraryForm</Display>
   <Edit>DocumentLibraryForm</Edit>
   <New>DocumentLibraryForm</New>
 </FormTemplates>
-</file>
-
-<file path=customXml/item3.xml><?xml version="1.0" encoding="utf-8"?>
-<p:properties xmlns:p="http://schemas.microsoft.com/office/2006/metadata/properties" xmlns:xsi="http://www.w3.org/2001/XMLSchema-instance" xmlns:pc="http://schemas.microsoft.com/office/infopath/2007/PartnerControls">
-  <documentManagement>
-    <_activity xmlns="a4af94e1-c1fc-4949-80ee-6d0f2b25a4fd" xsi:nil="true"/>
-  </documentManagement>
-</p:properties>
 </file>
 
 <file path=customXml/itemProps1.xml><?xml version="1.0" encoding="utf-8"?>
@@ -2493,14 +2743,6 @@
 </file>
 
 <file path=customXml/itemProps2.xml><?xml version="1.0" encoding="utf-8"?>
-<ds:datastoreItem xmlns:ds="http://schemas.openxmlformats.org/officeDocument/2006/customXml" ds:itemID="{A32B4A66-F859-40E3-BB80-2813DE49481C}">
-  <ds:schemaRefs>
-    <ds:schemaRef ds:uri="http://schemas.microsoft.com/sharepoint/v3/contenttype/forms"/>
-  </ds:schemaRefs>
-</ds:datastoreItem>
-</file>
-
-<file path=customXml/itemProps3.xml><?xml version="1.0" encoding="utf-8"?>
 <ds:datastoreItem xmlns:ds="http://schemas.openxmlformats.org/officeDocument/2006/customXml" ds:itemID="{B536A920-CFA6-45F7-AAF4-D5E5B2A432A5}">
   <ds:schemaRefs>
     <ds:schemaRef ds:uri="http://schemas.microsoft.com/office/infopath/2007/PartnerControls"/>
@@ -2515,4 +2757,12 @@
     <ds:schemaRef ds:uri="http://purl.org/dc/terms/"/>
   </ds:schemaRefs>
 </ds:datastoreItem>
+</file>
+
+<file path=customXml/itemProps3.xml><?xml version="1.0" encoding="utf-8"?>
+<ds:datastoreItem xmlns:ds="http://schemas.openxmlformats.org/officeDocument/2006/customXml" ds:itemID="{A32B4A66-F859-40E3-BB80-2813DE49481C}">
+  <ds:schemaRefs>
+    <ds:schemaRef ds:uri="http://schemas.microsoft.com/sharepoint/v3/contenttype/forms"/>
+  </ds:schemaRefs>
+</ds:datastoreItem>
 </file>
--- a/figs/slip_length_summary/output/fig.pptx
+++ b/figs/slip_length_summary/output/fig.pptx
@@ -5,7 +5,7 @@
     <p:sldMasterId id="2147483648" r:id="rId4"/>
   </p:sldMasterIdLst>
   <p:notesMasterIdLst>
-    <p:notesMasterId r:id="rId13"/>
+    <p:notesMasterId r:id="rId15"/>
   </p:notesMasterIdLst>
   <p:sldIdLst>
     <p:sldId id="257" r:id="rId5"/>
@@ -16,6 +16,8 @@
     <p:sldId id="262" r:id="rId10"/>
     <p:sldId id="263" r:id="rId11"/>
     <p:sldId id="264" r:id="rId12"/>
+    <p:sldId id="265" r:id="rId13"/>
+    <p:sldId id="266" r:id="rId14"/>
   </p:sldIdLst>
   <p:sldSz cx="12192000" cy="6858000"/>
   <p:notesSz cx="6858000" cy="9144000"/>
@@ -955,6 +957,130 @@
 </p:sld>
 </file>
 
+<file path=ppt/slides/slide10.xml><?xml version="1.0" encoding="utf-8"?>
+<p:sld xmlns:a="http://schemas.openxmlformats.org/drawingml/2006/main" xmlns:r="http://schemas.openxmlformats.org/officeDocument/2006/relationships" xmlns:p="http://schemas.openxmlformats.org/presentationml/2006/main">
+  <p:cSld>
+    <p:spTree>
+      <p:nvGrpSpPr>
+        <p:cNvPr id="1" name=""/>
+        <p:cNvGrpSpPr/>
+        <p:nvPr/>
+      </p:nvGrpSpPr>
+      <p:grpSpPr>
+        <a:xfrm>
+          <a:off x="0" y="0"/>
+          <a:ext cx="0" cy="0"/>
+          <a:chOff x="0" y="0"/>
+          <a:chExt cx="0" cy="0"/>
+        </a:xfrm>
+      </p:grpSpPr>
+      <p:grpSp>
+        <p:nvGrpSpPr>
+          <p:cNvPr id="6" name="グループ化 5">
+            <a:extLst>
+              <a:ext uri="{FF2B5EF4-FFF2-40B4-BE49-F238E27FC236}">
+                <a16:creationId xmlns:a16="http://schemas.microsoft.com/office/drawing/2014/main" id="{8295C5B2-B035-3F8C-256D-A11660DCD2B6}"/>
+              </a:ext>
+            </a:extLst>
+          </p:cNvPr>
+          <p:cNvGrpSpPr/>
+          <p:nvPr/>
+        </p:nvGrpSpPr>
+        <p:grpSpPr>
+          <a:xfrm>
+            <a:off x="3505200" y="1413164"/>
+            <a:ext cx="7467600" cy="4045527"/>
+            <a:chOff x="3505200" y="1413164"/>
+            <a:chExt cx="7467600" cy="4045527"/>
+          </a:xfrm>
+        </p:grpSpPr>
+        <p:pic>
+          <p:nvPicPr>
+            <p:cNvPr id="3" name="グラフィックス 2">
+              <a:extLst>
+                <a:ext uri="{FF2B5EF4-FFF2-40B4-BE49-F238E27FC236}">
+                  <a16:creationId xmlns:a16="http://schemas.microsoft.com/office/drawing/2014/main" id="{CF19782C-78A8-F075-E639-D3BD9AE3DED4}"/>
+                </a:ext>
+              </a:extLst>
+            </p:cNvPr>
+            <p:cNvPicPr>
+              <a:picLocks noChangeAspect="1"/>
+            </p:cNvPicPr>
+            <p:nvPr/>
+          </p:nvPicPr>
+          <p:blipFill>
+            <a:blip r:embed="rId2">
+              <a:extLst>
+                <a:ext uri="{96DAC541-7B7A-43D3-8B79-37D633B846F1}">
+                  <asvg:svgBlip xmlns:asvg="http://schemas.microsoft.com/office/drawing/2016/SVG/main" r:embed="rId3"/>
+                </a:ext>
+              </a:extLst>
+            </a:blip>
+            <a:srcRect t="12140" b="11880"/>
+            <a:stretch>
+              <a:fillRect/>
+            </a:stretch>
+          </p:blipFill>
+          <p:spPr>
+            <a:xfrm>
+              <a:off x="8686800" y="1413164"/>
+              <a:ext cx="2286000" cy="4045527"/>
+            </a:xfrm>
+            <a:prstGeom prst="rect">
+              <a:avLst/>
+            </a:prstGeom>
+          </p:spPr>
+        </p:pic>
+        <p:pic>
+          <p:nvPicPr>
+            <p:cNvPr id="5" name="グラフィックス 4">
+              <a:extLst>
+                <a:ext uri="{FF2B5EF4-FFF2-40B4-BE49-F238E27FC236}">
+                  <a16:creationId xmlns:a16="http://schemas.microsoft.com/office/drawing/2014/main" id="{5628EBC3-629B-DD36-D3B3-CF65767AB8D5}"/>
+                </a:ext>
+              </a:extLst>
+            </p:cNvPr>
+            <p:cNvPicPr>
+              <a:picLocks noChangeAspect="1"/>
+            </p:cNvPicPr>
+            <p:nvPr/>
+          </p:nvPicPr>
+          <p:blipFill>
+            <a:blip r:embed="rId4">
+              <a:extLst>
+                <a:ext uri="{96DAC541-7B7A-43D3-8B79-37D633B846F1}">
+                  <asvg:svgBlip xmlns:asvg="http://schemas.microsoft.com/office/drawing/2016/SVG/main" r:embed="rId5"/>
+                </a:ext>
+              </a:extLst>
+            </a:blip>
+            <a:stretch>
+              <a:fillRect/>
+            </a:stretch>
+          </p:blipFill>
+          <p:spPr>
+            <a:xfrm>
+              <a:off x="3505200" y="1476375"/>
+              <a:ext cx="5181600" cy="3905250"/>
+            </a:xfrm>
+            <a:prstGeom prst="rect">
+              <a:avLst/>
+            </a:prstGeom>
+          </p:spPr>
+        </p:pic>
+      </p:grpSp>
+    </p:spTree>
+    <p:extLst>
+      <p:ext uri="{BB962C8B-B14F-4D97-AF65-F5344CB8AC3E}">
+        <p14:creationId xmlns:p14="http://schemas.microsoft.com/office/powerpoint/2010/main" val="560887523"/>
+      </p:ext>
+    </p:extLst>
+  </p:cSld>
+  <p:clrMapOvr>
+    <a:masterClrMapping/>
+  </p:clrMapOvr>
+</p:sld>
+</file>
+
 <file path=ppt/slides/slide2.xml><?xml version="1.0" encoding="utf-8"?>
 <p:sld xmlns:a="http://schemas.openxmlformats.org/drawingml/2006/main" xmlns:r="http://schemas.openxmlformats.org/officeDocument/2006/relationships" xmlns:p="http://schemas.openxmlformats.org/presentationml/2006/main">
   <p:cSld>
@@ -1814,6 +1940,108 @@
     <p:extLst>
       <p:ext uri="{BB962C8B-B14F-4D97-AF65-F5344CB8AC3E}">
         <p14:creationId xmlns:p14="http://schemas.microsoft.com/office/powerpoint/2010/main" val="3311656778"/>
+      </p:ext>
+    </p:extLst>
+  </p:cSld>
+  <p:clrMapOvr>
+    <a:masterClrMapping/>
+  </p:clrMapOvr>
+</p:sld>
+</file>
+
+<file path=ppt/slides/slide9.xml><?xml version="1.0" encoding="utf-8"?>
+<p:sld xmlns:a="http://schemas.openxmlformats.org/drawingml/2006/main" xmlns:r="http://schemas.openxmlformats.org/officeDocument/2006/relationships" xmlns:p="http://schemas.openxmlformats.org/presentationml/2006/main">
+  <p:cSld>
+    <p:spTree>
+      <p:nvGrpSpPr>
+        <p:cNvPr id="1" name=""/>
+        <p:cNvGrpSpPr/>
+        <p:nvPr/>
+      </p:nvGrpSpPr>
+      <p:grpSpPr>
+        <a:xfrm>
+          <a:off x="0" y="0"/>
+          <a:ext cx="0" cy="0"/>
+          <a:chOff x="0" y="0"/>
+          <a:chExt cx="0" cy="0"/>
+        </a:xfrm>
+      </p:grpSpPr>
+      <p:pic>
+        <p:nvPicPr>
+          <p:cNvPr id="3" name="グラフィックス 2">
+            <a:extLst>
+              <a:ext uri="{FF2B5EF4-FFF2-40B4-BE49-F238E27FC236}">
+                <a16:creationId xmlns:a16="http://schemas.microsoft.com/office/drawing/2014/main" id="{0FEF1DE6-BFC0-BA04-1F13-D4D142AF204E}"/>
+              </a:ext>
+            </a:extLst>
+          </p:cNvPr>
+          <p:cNvPicPr>
+            <a:picLocks noChangeAspect="1"/>
+          </p:cNvPicPr>
+          <p:nvPr/>
+        </p:nvPicPr>
+        <p:blipFill>
+          <a:blip r:embed="rId2">
+            <a:extLst>
+              <a:ext uri="{96DAC541-7B7A-43D3-8B79-37D633B846F1}">
+                <asvg:svgBlip xmlns:asvg="http://schemas.microsoft.com/office/drawing/2016/SVG/main" r:embed="rId3"/>
+              </a:ext>
+            </a:extLst>
+          </a:blip>
+          <a:stretch>
+            <a:fillRect/>
+          </a:stretch>
+        </p:blipFill>
+        <p:spPr>
+          <a:xfrm>
+            <a:off x="8686800" y="766762"/>
+            <a:ext cx="2286000" cy="5324475"/>
+          </a:xfrm>
+          <a:prstGeom prst="rect">
+            <a:avLst/>
+          </a:prstGeom>
+        </p:spPr>
+      </p:pic>
+      <p:pic>
+        <p:nvPicPr>
+          <p:cNvPr id="5" name="グラフィックス 4">
+            <a:extLst>
+              <a:ext uri="{FF2B5EF4-FFF2-40B4-BE49-F238E27FC236}">
+                <a16:creationId xmlns:a16="http://schemas.microsoft.com/office/drawing/2014/main" id="{6A3521A3-A64C-23D0-7D55-809BF1A1F210}"/>
+              </a:ext>
+            </a:extLst>
+          </p:cNvPr>
+          <p:cNvPicPr>
+            <a:picLocks noChangeAspect="1"/>
+          </p:cNvPicPr>
+          <p:nvPr/>
+        </p:nvPicPr>
+        <p:blipFill>
+          <a:blip r:embed="rId4">
+            <a:extLst>
+              <a:ext uri="{96DAC541-7B7A-43D3-8B79-37D633B846F1}">
+                <asvg:svgBlip xmlns:asvg="http://schemas.microsoft.com/office/drawing/2016/SVG/main" r:embed="rId5"/>
+              </a:ext>
+            </a:extLst>
+          </a:blip>
+          <a:stretch>
+            <a:fillRect/>
+          </a:stretch>
+        </p:blipFill>
+        <p:spPr>
+          <a:xfrm>
+            <a:off x="1870364" y="1476374"/>
+            <a:ext cx="5181600" cy="3905250"/>
+          </a:xfrm>
+          <a:prstGeom prst="rect">
+            <a:avLst/>
+          </a:prstGeom>
+        </p:spPr>
+      </p:pic>
+    </p:spTree>
+    <p:extLst>
+      <p:ext uri="{BB962C8B-B14F-4D97-AF65-F5344CB8AC3E}">
+        <p14:creationId xmlns:p14="http://schemas.microsoft.com/office/powerpoint/2010/main" val="2929260636"/>
       </p:ext>
     </p:extLst>
   </p:cSld>
@@ -2454,6 +2682,14 @@
 </file>
 
 <file path=customXml/item1.xml><?xml version="1.0" encoding="utf-8"?>
+<p:properties xmlns:p="http://schemas.microsoft.com/office/2006/metadata/properties" xmlns:xsi="http://www.w3.org/2001/XMLSchema-instance" xmlns:pc="http://schemas.microsoft.com/office/infopath/2007/PartnerControls">
+  <documentManagement>
+    <_activity xmlns="a4af94e1-c1fc-4949-80ee-6d0f2b25a4fd" xsi:nil="true"/>
+  </documentManagement>
+</p:properties>
+</file>
+
+<file path=customXml/item2.xml><?xml version="1.0" encoding="utf-8"?>
 <ct:contentTypeSchema xmlns:ct="http://schemas.microsoft.com/office/2006/metadata/contentType" xmlns:ma="http://schemas.microsoft.com/office/2006/metadata/properties/metaAttributes" ct:_="" ma:_="" ma:contentTypeName="ドキュメント" ma:contentTypeID="0x01010001977AFA83253148B9A11DE7E57585DA" ma:contentTypeVersion="18" ma:contentTypeDescription="新しいドキュメントを作成します。" ma:contentTypeScope="" ma:versionID="c33b06d1a59709aebae5ef90ac421293">
   <xsd:schema xmlns:xsd="http://www.w3.org/2001/XMLSchema" xmlns:xs="http://www.w3.org/2001/XMLSchema" xmlns:p="http://schemas.microsoft.com/office/2006/metadata/properties" xmlns:ns3="a4af94e1-c1fc-4949-80ee-6d0f2b25a4fd" xmlns:ns4="6e67e666-c3e9-4393-909a-82e166baf630" targetNamespace="http://schemas.microsoft.com/office/2006/metadata/properties" ma:root="true" ma:fieldsID="5929bf68818a63ba6b6aa8003b159019" ns3:_="" ns4:_="">
     <xsd:import namespace="a4af94e1-c1fc-4949-80ee-6d0f2b25a4fd"/>
@@ -2706,14 +2942,6 @@
 </ct:contentTypeSchema>
 </file>
 
-<file path=customXml/item2.xml><?xml version="1.0" encoding="utf-8"?>
-<p:properties xmlns:p="http://schemas.microsoft.com/office/2006/metadata/properties" xmlns:xsi="http://www.w3.org/2001/XMLSchema-instance" xmlns:pc="http://schemas.microsoft.com/office/infopath/2007/PartnerControls">
-  <documentManagement>
-    <_activity xmlns="a4af94e1-c1fc-4949-80ee-6d0f2b25a4fd" xsi:nil="true"/>
-  </documentManagement>
-</p:properties>
-</file>
-
 <file path=customXml/item3.xml><?xml version="1.0" encoding="utf-8"?>
 <?mso-contentType ?>
 <FormTemplates xmlns="http://schemas.microsoft.com/sharepoint/v3/contenttype/forms">
@@ -2724,6 +2952,23 @@
 </file>
 
 <file path=customXml/itemProps1.xml><?xml version="1.0" encoding="utf-8"?>
+<ds:datastoreItem xmlns:ds="http://schemas.openxmlformats.org/officeDocument/2006/customXml" ds:itemID="{B536A920-CFA6-45F7-AAF4-D5E5B2A432A5}">
+  <ds:schemaRefs>
+    <ds:schemaRef ds:uri="http://schemas.microsoft.com/office/infopath/2007/PartnerControls"/>
+    <ds:schemaRef ds:uri="http://schemas.microsoft.com/office/2006/metadata/properties"/>
+    <ds:schemaRef ds:uri="http://schemas.microsoft.com/office/2006/documentManagement/types"/>
+    <ds:schemaRef ds:uri="http://purl.org/dc/elements/1.1/"/>
+    <ds:schemaRef ds:uri="http://purl.org/dc/dcmitype/"/>
+    <ds:schemaRef ds:uri="http://www.w3.org/XML/1998/namespace"/>
+    <ds:schemaRef ds:uri="a4af94e1-c1fc-4949-80ee-6d0f2b25a4fd"/>
+    <ds:schemaRef ds:uri="http://schemas.openxmlformats.org/package/2006/metadata/core-properties"/>
+    <ds:schemaRef ds:uri="6e67e666-c3e9-4393-909a-82e166baf630"/>
+    <ds:schemaRef ds:uri="http://purl.org/dc/terms/"/>
+  </ds:schemaRefs>
+</ds:datastoreItem>
+</file>
+
+<file path=customXml/itemProps2.xml><?xml version="1.0" encoding="utf-8"?>
 <ds:datastoreItem xmlns:ds="http://schemas.openxmlformats.org/officeDocument/2006/customXml" ds:itemID="{4CF7E964-C6F6-44DA-86BC-C4F5D23786D9}">
   <ds:schemaRefs>
     <ds:schemaRef ds:uri="http://schemas.microsoft.com/office/2006/metadata/contentType"/>
@@ -2742,23 +2987,6 @@
 </ds:datastoreItem>
 </file>
 
-<file path=customXml/itemProps2.xml><?xml version="1.0" encoding="utf-8"?>
-<ds:datastoreItem xmlns:ds="http://schemas.openxmlformats.org/officeDocument/2006/customXml" ds:itemID="{B536A920-CFA6-45F7-AAF4-D5E5B2A432A5}">
-  <ds:schemaRefs>
-    <ds:schemaRef ds:uri="http://schemas.microsoft.com/office/infopath/2007/PartnerControls"/>
-    <ds:schemaRef ds:uri="http://schemas.microsoft.com/office/2006/metadata/properties"/>
-    <ds:schemaRef ds:uri="http://schemas.microsoft.com/office/2006/documentManagement/types"/>
-    <ds:schemaRef ds:uri="http://purl.org/dc/elements/1.1/"/>
-    <ds:schemaRef ds:uri="http://purl.org/dc/dcmitype/"/>
-    <ds:schemaRef ds:uri="http://www.w3.org/XML/1998/namespace"/>
-    <ds:schemaRef ds:uri="a4af94e1-c1fc-4949-80ee-6d0f2b25a4fd"/>
-    <ds:schemaRef ds:uri="http://schemas.openxmlformats.org/package/2006/metadata/core-properties"/>
-    <ds:schemaRef ds:uri="6e67e666-c3e9-4393-909a-82e166baf630"/>
-    <ds:schemaRef ds:uri="http://purl.org/dc/terms/"/>
-  </ds:schemaRefs>
-</ds:datastoreItem>
-</file>
-
 <file path=customXml/itemProps3.xml><?xml version="1.0" encoding="utf-8"?>
 <ds:datastoreItem xmlns:ds="http://schemas.openxmlformats.org/officeDocument/2006/customXml" ds:itemID="{A32B4A66-F859-40E3-BB80-2813DE49481C}">
   <ds:schemaRefs>

--- a/figs/slip_length_summary/output/fig.pptx
+++ b/figs/slip_length_summary/output/fig.pptx
@@ -5,7 +5,7 @@
     <p:sldMasterId id="2147483648" r:id="rId4"/>
   </p:sldMasterIdLst>
   <p:notesMasterIdLst>
-    <p:notesMasterId r:id="rId15"/>
+    <p:notesMasterId r:id="rId16"/>
   </p:notesMasterIdLst>
   <p:sldIdLst>
     <p:sldId id="257" r:id="rId5"/>
@@ -18,6 +18,7 @@
     <p:sldId id="264" r:id="rId12"/>
     <p:sldId id="265" r:id="rId13"/>
     <p:sldId id="266" r:id="rId14"/>
+    <p:sldId id="267" r:id="rId15"/>
   </p:sldIdLst>
   <p:sldSz cx="12192000" cy="6858000"/>
   <p:notesSz cx="6858000" cy="9144000"/>
@@ -209,7 +210,7 @@
           <a:p>
             <a:fld id="{58ACC529-06C9-45FD-94D7-552AA2810228}" type="datetimeFigureOut">
               <a:rPr kumimoji="1" lang="ja-JP" altLang="en-US" smtClean="0"/>
-              <a:t>2026/3/5</a:t>
+              <a:t>2026/3/16</a:t>
             </a:fld>
             <a:endParaRPr kumimoji="1" lang="ja-JP" altLang="en-US"/>
           </a:p>
@@ -1072,6 +1073,109 @@
     <p:extLst>
       <p:ext uri="{BB962C8B-B14F-4D97-AF65-F5344CB8AC3E}">
         <p14:creationId xmlns:p14="http://schemas.microsoft.com/office/powerpoint/2010/main" val="560887523"/>
+      </p:ext>
+    </p:extLst>
+  </p:cSld>
+  <p:clrMapOvr>
+    <a:masterClrMapping/>
+  </p:clrMapOvr>
+</p:sld>
+</file>
+
+<file path=ppt/slides/slide11.xml><?xml version="1.0" encoding="utf-8"?>
+<p:sld xmlns:a="http://schemas.openxmlformats.org/drawingml/2006/main" xmlns:r="http://schemas.openxmlformats.org/officeDocument/2006/relationships" xmlns:p="http://schemas.openxmlformats.org/presentationml/2006/main">
+  <p:cSld>
+    <p:spTree>
+      <p:nvGrpSpPr>
+        <p:cNvPr id="1" name=""/>
+        <p:cNvGrpSpPr/>
+        <p:nvPr/>
+      </p:nvGrpSpPr>
+      <p:grpSpPr>
+        <a:xfrm>
+          <a:off x="0" y="0"/>
+          <a:ext cx="0" cy="0"/>
+          <a:chOff x="0" y="0"/>
+          <a:chExt cx="0" cy="0"/>
+        </a:xfrm>
+      </p:grpSpPr>
+      <p:pic>
+        <p:nvPicPr>
+          <p:cNvPr id="3" name="グラフィックス 2">
+            <a:extLst>
+              <a:ext uri="{FF2B5EF4-FFF2-40B4-BE49-F238E27FC236}">
+                <a16:creationId xmlns:a16="http://schemas.microsoft.com/office/drawing/2014/main" id="{764A89DB-7E1D-88AF-3D1F-3FD792D54912}"/>
+              </a:ext>
+            </a:extLst>
+          </p:cNvPr>
+          <p:cNvPicPr>
+            <a:picLocks noChangeAspect="1"/>
+          </p:cNvPicPr>
+          <p:nvPr/>
+        </p:nvPicPr>
+        <p:blipFill>
+          <a:blip r:embed="rId2">
+            <a:extLst>
+              <a:ext uri="{96DAC541-7B7A-43D3-8B79-37D633B846F1}">
+                <asvg:svgBlip xmlns:asvg="http://schemas.microsoft.com/office/drawing/2016/SVG/main" r:embed="rId3"/>
+              </a:ext>
+            </a:extLst>
+          </a:blip>
+          <a:srcRect t="11793" b="11880"/>
+          <a:stretch>
+            <a:fillRect/>
+          </a:stretch>
+        </p:blipFill>
+        <p:spPr>
+          <a:xfrm>
+            <a:off x="8686800" y="1394691"/>
+            <a:ext cx="2286000" cy="4064000"/>
+          </a:xfrm>
+          <a:prstGeom prst="rect">
+            <a:avLst/>
+          </a:prstGeom>
+        </p:spPr>
+      </p:pic>
+      <p:pic>
+        <p:nvPicPr>
+          <p:cNvPr id="5" name="グラフィックス 4">
+            <a:extLst>
+              <a:ext uri="{FF2B5EF4-FFF2-40B4-BE49-F238E27FC236}">
+                <a16:creationId xmlns:a16="http://schemas.microsoft.com/office/drawing/2014/main" id="{62B558FF-74FA-EAE7-61BA-3E6C34B8BF31}"/>
+              </a:ext>
+            </a:extLst>
+          </p:cNvPr>
+          <p:cNvPicPr>
+            <a:picLocks noChangeAspect="1"/>
+          </p:cNvPicPr>
+          <p:nvPr/>
+        </p:nvPicPr>
+        <p:blipFill>
+          <a:blip r:embed="rId4">
+            <a:extLst>
+              <a:ext uri="{96DAC541-7B7A-43D3-8B79-37D633B846F1}">
+                <asvg:svgBlip xmlns:asvg="http://schemas.microsoft.com/office/drawing/2016/SVG/main" r:embed="rId5"/>
+              </a:ext>
+            </a:extLst>
+          </a:blip>
+          <a:stretch>
+            <a:fillRect/>
+          </a:stretch>
+        </p:blipFill>
+        <p:spPr>
+          <a:xfrm>
+            <a:off x="3505200" y="1476375"/>
+            <a:ext cx="5181600" cy="3905250"/>
+          </a:xfrm>
+          <a:prstGeom prst="rect">
+            <a:avLst/>
+          </a:prstGeom>
+        </p:spPr>
+      </p:pic>
+    </p:spTree>
+    <p:extLst>
+      <p:ext uri="{BB962C8B-B14F-4D97-AF65-F5344CB8AC3E}">
+        <p14:creationId xmlns:p14="http://schemas.microsoft.com/office/powerpoint/2010/main" val="1543257032"/>
       </p:ext>
     </p:extLst>
   </p:cSld>
@@ -2682,14 +2786,6 @@
 </file>
 
 <file path=customXml/item1.xml><?xml version="1.0" encoding="utf-8"?>
-<p:properties xmlns:p="http://schemas.microsoft.com/office/2006/metadata/properties" xmlns:xsi="http://www.w3.org/2001/XMLSchema-instance" xmlns:pc="http://schemas.microsoft.com/office/infopath/2007/PartnerControls">
-  <documentManagement>
-    <_activity xmlns="a4af94e1-c1fc-4949-80ee-6d0f2b25a4fd" xsi:nil="true"/>
-  </documentManagement>
-</p:properties>
-</file>
-
-<file path=customXml/item2.xml><?xml version="1.0" encoding="utf-8"?>
 <ct:contentTypeSchema xmlns:ct="http://schemas.microsoft.com/office/2006/metadata/contentType" xmlns:ma="http://schemas.microsoft.com/office/2006/metadata/properties/metaAttributes" ct:_="" ma:_="" ma:contentTypeName="ドキュメント" ma:contentTypeID="0x01010001977AFA83253148B9A11DE7E57585DA" ma:contentTypeVersion="18" ma:contentTypeDescription="新しいドキュメントを作成します。" ma:contentTypeScope="" ma:versionID="c33b06d1a59709aebae5ef90ac421293">
   <xsd:schema xmlns:xsd="http://www.w3.org/2001/XMLSchema" xmlns:xs="http://www.w3.org/2001/XMLSchema" xmlns:p="http://schemas.microsoft.com/office/2006/metadata/properties" xmlns:ns3="a4af94e1-c1fc-4949-80ee-6d0f2b25a4fd" xmlns:ns4="6e67e666-c3e9-4393-909a-82e166baf630" targetNamespace="http://schemas.microsoft.com/office/2006/metadata/properties" ma:root="true" ma:fieldsID="5929bf68818a63ba6b6aa8003b159019" ns3:_="" ns4:_="">
     <xsd:import namespace="a4af94e1-c1fc-4949-80ee-6d0f2b25a4fd"/>
@@ -2942,6 +3038,14 @@
 </ct:contentTypeSchema>
 </file>
 
+<file path=customXml/item2.xml><?xml version="1.0" encoding="utf-8"?>
+<p:properties xmlns:p="http://schemas.microsoft.com/office/2006/metadata/properties" xmlns:xsi="http://www.w3.org/2001/XMLSchema-instance" xmlns:pc="http://schemas.microsoft.com/office/infopath/2007/PartnerControls">
+  <documentManagement>
+    <_activity xmlns="a4af94e1-c1fc-4949-80ee-6d0f2b25a4fd" xsi:nil="true"/>
+  </documentManagement>
+</p:properties>
+</file>
+
 <file path=customXml/item3.xml><?xml version="1.0" encoding="utf-8"?>
 <?mso-contentType ?>
 <FormTemplates xmlns="http://schemas.microsoft.com/sharepoint/v3/contenttype/forms">
@@ -2952,23 +3056,6 @@
 </file>
 
 <file path=customXml/itemProps1.xml><?xml version="1.0" encoding="utf-8"?>
-<ds:datastoreItem xmlns:ds="http://schemas.openxmlformats.org/officeDocument/2006/customXml" ds:itemID="{B536A920-CFA6-45F7-AAF4-D5E5B2A432A5}">
-  <ds:schemaRefs>
-    <ds:schemaRef ds:uri="http://schemas.microsoft.com/office/infopath/2007/PartnerControls"/>
-    <ds:schemaRef ds:uri="http://schemas.microsoft.com/office/2006/metadata/properties"/>
-    <ds:schemaRef ds:uri="http://schemas.microsoft.com/office/2006/documentManagement/types"/>
-    <ds:schemaRef ds:uri="http://purl.org/dc/elements/1.1/"/>
-    <ds:schemaRef ds:uri="http://purl.org/dc/dcmitype/"/>
-    <ds:schemaRef ds:uri="http://www.w3.org/XML/1998/namespace"/>
-    <ds:schemaRef ds:uri="a4af94e1-c1fc-4949-80ee-6d0f2b25a4fd"/>
-    <ds:schemaRef ds:uri="http://schemas.openxmlformats.org/package/2006/metadata/core-properties"/>
-    <ds:schemaRef ds:uri="6e67e666-c3e9-4393-909a-82e166baf630"/>
-    <ds:schemaRef ds:uri="http://purl.org/dc/terms/"/>
-  </ds:schemaRefs>
-</ds:datastoreItem>
-</file>
-
-<file path=customXml/itemProps2.xml><?xml version="1.0" encoding="utf-8"?>
 <ds:datastoreItem xmlns:ds="http://schemas.openxmlformats.org/officeDocument/2006/customXml" ds:itemID="{4CF7E964-C6F6-44DA-86BC-C4F5D23786D9}">
   <ds:schemaRefs>
     <ds:schemaRef ds:uri="http://schemas.microsoft.com/office/2006/metadata/contentType"/>
@@ -2987,6 +3074,23 @@
 </ds:datastoreItem>
 </file>
 
+<file path=customXml/itemProps2.xml><?xml version="1.0" encoding="utf-8"?>
+<ds:datastoreItem xmlns:ds="http://schemas.openxmlformats.org/officeDocument/2006/customXml" ds:itemID="{B536A920-CFA6-45F7-AAF4-D5E5B2A432A5}">
+  <ds:schemaRefs>
+    <ds:schemaRef ds:uri="http://schemas.microsoft.com/office/infopath/2007/PartnerControls"/>
+    <ds:schemaRef ds:uri="http://schemas.microsoft.com/office/2006/metadata/properties"/>
+    <ds:schemaRef ds:uri="http://schemas.microsoft.com/office/2006/documentManagement/types"/>
+    <ds:schemaRef ds:uri="http://purl.org/dc/elements/1.1/"/>
+    <ds:schemaRef ds:uri="http://purl.org/dc/dcmitype/"/>
+    <ds:schemaRef ds:uri="http://www.w3.org/XML/1998/namespace"/>
+    <ds:schemaRef ds:uri="a4af94e1-c1fc-4949-80ee-6d0f2b25a4fd"/>
+    <ds:schemaRef ds:uri="http://schemas.openxmlformats.org/package/2006/metadata/core-properties"/>
+    <ds:schemaRef ds:uri="6e67e666-c3e9-4393-909a-82e166baf630"/>
+    <ds:schemaRef ds:uri="http://purl.org/dc/terms/"/>
+  </ds:schemaRefs>
+</ds:datastoreItem>
+</file>
+
 <file path=customXml/itemProps3.xml><?xml version="1.0" encoding="utf-8"?>
 <ds:datastoreItem xmlns:ds="http://schemas.openxmlformats.org/officeDocument/2006/customXml" ds:itemID="{A32B4A66-F859-40E3-BB80-2813DE49481C}">
   <ds:schemaRefs>

--- a/figs/slip_length_summary/output/fig.pptx
+++ b/figs/slip_length_summary/output/fig.pptx
@@ -5,7 +5,7 @@
     <p:sldMasterId id="2147483648" r:id="rId4"/>
   </p:sldMasterIdLst>
   <p:notesMasterIdLst>
-    <p:notesMasterId r:id="rId16"/>
+    <p:notesMasterId r:id="rId17"/>
   </p:notesMasterIdLst>
   <p:sldIdLst>
     <p:sldId id="257" r:id="rId5"/>
@@ -19,6 +19,7 @@
     <p:sldId id="265" r:id="rId13"/>
     <p:sldId id="266" r:id="rId14"/>
     <p:sldId id="267" r:id="rId15"/>
+    <p:sldId id="268" r:id="rId16"/>
   </p:sldIdLst>
   <p:sldSz cx="12192000" cy="6858000"/>
   <p:notesSz cx="6858000" cy="9144000"/>
@@ -210,7 +211,7 @@
           <a:p>
             <a:fld id="{58ACC529-06C9-45FD-94D7-552AA2810228}" type="datetimeFigureOut">
               <a:rPr kumimoji="1" lang="ja-JP" altLang="en-US" smtClean="0"/>
-              <a:t>2026/3/16</a:t>
+              <a:t>2026/3/18</a:t>
             </a:fld>
             <a:endParaRPr kumimoji="1" lang="ja-JP" altLang="en-US"/>
           </a:p>
@@ -1176,6 +1177,109 @@
     <p:extLst>
       <p:ext uri="{BB962C8B-B14F-4D97-AF65-F5344CB8AC3E}">
         <p14:creationId xmlns:p14="http://schemas.microsoft.com/office/powerpoint/2010/main" val="1543257032"/>
+      </p:ext>
+    </p:extLst>
+  </p:cSld>
+  <p:clrMapOvr>
+    <a:masterClrMapping/>
+  </p:clrMapOvr>
+</p:sld>
+</file>
+
+<file path=ppt/slides/slide12.xml><?xml version="1.0" encoding="utf-8"?>
+<p:sld xmlns:a="http://schemas.openxmlformats.org/drawingml/2006/main" xmlns:r="http://schemas.openxmlformats.org/officeDocument/2006/relationships" xmlns:p="http://schemas.openxmlformats.org/presentationml/2006/main">
+  <p:cSld>
+    <p:spTree>
+      <p:nvGrpSpPr>
+        <p:cNvPr id="1" name=""/>
+        <p:cNvGrpSpPr/>
+        <p:nvPr/>
+      </p:nvGrpSpPr>
+      <p:grpSpPr>
+        <a:xfrm>
+          <a:off x="0" y="0"/>
+          <a:ext cx="0" cy="0"/>
+          <a:chOff x="0" y="0"/>
+          <a:chExt cx="0" cy="0"/>
+        </a:xfrm>
+      </p:grpSpPr>
+      <p:pic>
+        <p:nvPicPr>
+          <p:cNvPr id="3" name="グラフィックス 2">
+            <a:extLst>
+              <a:ext uri="{FF2B5EF4-FFF2-40B4-BE49-F238E27FC236}">
+                <a16:creationId xmlns:a16="http://schemas.microsoft.com/office/drawing/2014/main" id="{36EEFB13-760E-B2BF-1562-0D42D4AC7F4A}"/>
+              </a:ext>
+            </a:extLst>
+          </p:cNvPr>
+          <p:cNvPicPr>
+            <a:picLocks noChangeAspect="1"/>
+          </p:cNvPicPr>
+          <p:nvPr/>
+        </p:nvPicPr>
+        <p:blipFill>
+          <a:blip r:embed="rId2">
+            <a:extLst>
+              <a:ext uri="{96DAC541-7B7A-43D3-8B79-37D633B846F1}">
+                <asvg:svgBlip xmlns:asvg="http://schemas.microsoft.com/office/drawing/2016/SVG/main" r:embed="rId3"/>
+              </a:ext>
+            </a:extLst>
+          </a:blip>
+          <a:stretch>
+            <a:fillRect/>
+          </a:stretch>
+        </p:blipFill>
+        <p:spPr>
+          <a:xfrm>
+            <a:off x="2627745" y="1587211"/>
+            <a:ext cx="5181600" cy="3905250"/>
+          </a:xfrm>
+          <a:prstGeom prst="rect">
+            <a:avLst/>
+          </a:prstGeom>
+        </p:spPr>
+      </p:pic>
+      <p:pic>
+        <p:nvPicPr>
+          <p:cNvPr id="5" name="グラフィックス 4">
+            <a:extLst>
+              <a:ext uri="{FF2B5EF4-FFF2-40B4-BE49-F238E27FC236}">
+                <a16:creationId xmlns:a16="http://schemas.microsoft.com/office/drawing/2014/main" id="{4E1A1D50-DE6A-E6A2-3655-9467AB5D2CC3}"/>
+              </a:ext>
+            </a:extLst>
+          </p:cNvPr>
+          <p:cNvPicPr>
+            <a:picLocks noChangeAspect="1"/>
+          </p:cNvPicPr>
+          <p:nvPr/>
+        </p:nvPicPr>
+        <p:blipFill>
+          <a:blip r:embed="rId4">
+            <a:extLst>
+              <a:ext uri="{96DAC541-7B7A-43D3-8B79-37D633B846F1}">
+                <asvg:svgBlip xmlns:asvg="http://schemas.microsoft.com/office/drawing/2016/SVG/main" r:embed="rId5"/>
+              </a:ext>
+            </a:extLst>
+          </a:blip>
+          <a:srcRect t="11967" b="12054"/>
+          <a:stretch>
+            <a:fillRect/>
+          </a:stretch>
+        </p:blipFill>
+        <p:spPr>
+          <a:xfrm>
+            <a:off x="7809345" y="1514764"/>
+            <a:ext cx="2286000" cy="4045527"/>
+          </a:xfrm>
+          <a:prstGeom prst="rect">
+            <a:avLst/>
+          </a:prstGeom>
+        </p:spPr>
+      </p:pic>
+    </p:spTree>
+    <p:extLst>
+      <p:ext uri="{BB962C8B-B14F-4D97-AF65-F5344CB8AC3E}">
+        <p14:creationId xmlns:p14="http://schemas.microsoft.com/office/powerpoint/2010/main" val="2209804349"/>
       </p:ext>
     </p:extLst>
   </p:cSld>
@@ -2786,6 +2890,14 @@
 </file>
 
 <file path=customXml/item1.xml><?xml version="1.0" encoding="utf-8"?>
+<p:properties xmlns:p="http://schemas.microsoft.com/office/2006/metadata/properties" xmlns:xsi="http://www.w3.org/2001/XMLSchema-instance" xmlns:pc="http://schemas.microsoft.com/office/infopath/2007/PartnerControls">
+  <documentManagement>
+    <_activity xmlns="a4af94e1-c1fc-4949-80ee-6d0f2b25a4fd" xsi:nil="true"/>
+  </documentManagement>
+</p:properties>
+</file>
+
+<file path=customXml/item2.xml><?xml version="1.0" encoding="utf-8"?>
 <ct:contentTypeSchema xmlns:ct="http://schemas.microsoft.com/office/2006/metadata/contentType" xmlns:ma="http://schemas.microsoft.com/office/2006/metadata/properties/metaAttributes" ct:_="" ma:_="" ma:contentTypeName="ドキュメント" ma:contentTypeID="0x01010001977AFA83253148B9A11DE7E57585DA" ma:contentTypeVersion="18" ma:contentTypeDescription="新しいドキュメントを作成します。" ma:contentTypeScope="" ma:versionID="c33b06d1a59709aebae5ef90ac421293">
   <xsd:schema xmlns:xsd="http://www.w3.org/2001/XMLSchema" xmlns:xs="http://www.w3.org/2001/XMLSchema" xmlns:p="http://schemas.microsoft.com/office/2006/metadata/properties" xmlns:ns3="a4af94e1-c1fc-4949-80ee-6d0f2b25a4fd" xmlns:ns4="6e67e666-c3e9-4393-909a-82e166baf630" targetNamespace="http://schemas.microsoft.com/office/2006/metadata/properties" ma:root="true" ma:fieldsID="5929bf68818a63ba6b6aa8003b159019" ns3:_="" ns4:_="">
     <xsd:import namespace="a4af94e1-c1fc-4949-80ee-6d0f2b25a4fd"/>
@@ -3038,14 +3150,6 @@
 </ct:contentTypeSchema>
 </file>
 
-<file path=customXml/item2.xml><?xml version="1.0" encoding="utf-8"?>
-<p:properties xmlns:p="http://schemas.microsoft.com/office/2006/metadata/properties" xmlns:xsi="http://www.w3.org/2001/XMLSchema-instance" xmlns:pc="http://schemas.microsoft.com/office/infopath/2007/PartnerControls">
-  <documentManagement>
-    <_activity xmlns="a4af94e1-c1fc-4949-80ee-6d0f2b25a4fd" xsi:nil="true"/>
-  </documentManagement>
-</p:properties>
-</file>
-
 <file path=customXml/item3.xml><?xml version="1.0" encoding="utf-8"?>
 <?mso-contentType ?>
 <FormTemplates xmlns="http://schemas.microsoft.com/sharepoint/v3/contenttype/forms">
@@ -3056,6 +3160,23 @@
 </file>
 
 <file path=customXml/itemProps1.xml><?xml version="1.0" encoding="utf-8"?>
+<ds:datastoreItem xmlns:ds="http://schemas.openxmlformats.org/officeDocument/2006/customXml" ds:itemID="{B536A920-CFA6-45F7-AAF4-D5E5B2A432A5}">
+  <ds:schemaRefs>
+    <ds:schemaRef ds:uri="http://schemas.microsoft.com/office/infopath/2007/PartnerControls"/>
+    <ds:schemaRef ds:uri="http://schemas.microsoft.com/office/2006/metadata/properties"/>
+    <ds:schemaRef ds:uri="http://schemas.microsoft.com/office/2006/documentManagement/types"/>
+    <ds:schemaRef ds:uri="http://purl.org/dc/elements/1.1/"/>
+    <ds:schemaRef ds:uri="http://purl.org/dc/dcmitype/"/>
+    <ds:schemaRef ds:uri="http://www.w3.org/XML/1998/namespace"/>
+    <ds:schemaRef ds:uri="a4af94e1-c1fc-4949-80ee-6d0f2b25a4fd"/>
+    <ds:schemaRef ds:uri="http://schemas.openxmlformats.org/package/2006/metadata/core-properties"/>
+    <ds:schemaRef ds:uri="6e67e666-c3e9-4393-909a-82e166baf630"/>
+    <ds:schemaRef ds:uri="http://purl.org/dc/terms/"/>
+  </ds:schemaRefs>
+</ds:datastoreItem>
+</file>
+
+<file path=customXml/itemProps2.xml><?xml version="1.0" encoding="utf-8"?>
 <ds:datastoreItem xmlns:ds="http://schemas.openxmlformats.org/officeDocument/2006/customXml" ds:itemID="{4CF7E964-C6F6-44DA-86BC-C4F5D23786D9}">
   <ds:schemaRefs>
     <ds:schemaRef ds:uri="http://schemas.microsoft.com/office/2006/metadata/contentType"/>
@@ -3074,23 +3195,6 @@
 </ds:datastoreItem>
 </file>
 
-<file path=customXml/itemProps2.xml><?xml version="1.0" encoding="utf-8"?>
-<ds:datastoreItem xmlns:ds="http://schemas.openxmlformats.org/officeDocument/2006/customXml" ds:itemID="{B536A920-CFA6-45F7-AAF4-D5E5B2A432A5}">
-  <ds:schemaRefs>
-    <ds:schemaRef ds:uri="http://schemas.microsoft.com/office/infopath/2007/PartnerControls"/>
-    <ds:schemaRef ds:uri="http://schemas.microsoft.com/office/2006/metadata/properties"/>
-    <ds:schemaRef ds:uri="http://schemas.microsoft.com/office/2006/documentManagement/types"/>
-    <ds:schemaRef ds:uri="http://purl.org/dc/elements/1.1/"/>
-    <ds:schemaRef ds:uri="http://purl.org/dc/dcmitype/"/>
-    <ds:schemaRef ds:uri="http://www.w3.org/XML/1998/namespace"/>
-    <ds:schemaRef ds:uri="a4af94e1-c1fc-4949-80ee-6d0f2b25a4fd"/>
-    <ds:schemaRef ds:uri="http://schemas.openxmlformats.org/package/2006/metadata/core-properties"/>
-    <ds:schemaRef ds:uri="6e67e666-c3e9-4393-909a-82e166baf630"/>
-    <ds:schemaRef ds:uri="http://purl.org/dc/terms/"/>
-  </ds:schemaRefs>
-</ds:datastoreItem>
-</file>
-
 <file path=customXml/itemProps3.xml><?xml version="1.0" encoding="utf-8"?>
 <ds:datastoreItem xmlns:ds="http://schemas.openxmlformats.org/officeDocument/2006/customXml" ds:itemID="{A32B4A66-F859-40E3-BB80-2813DE49481C}">
   <ds:schemaRefs>
